--- a/docs/po/presentations/LifeLinkKH-v1.pptx
+++ b/docs/po/presentations/LifeLinkKH-v1.pptx
@@ -873,12 +873,27 @@
           <a:p/>
           <a:p>
             <a:r>
-              <a:t>If asked who does what day to day: one person holds several roles right now, which we know</a:t>
-            </a:r>
-          </a:p>
-          <a:p>
-            <a:r>
-              <a:t>concentrates approval in one place. QA sign-off is kept independent for exactly that reason.</a:t>
+              <a:t>If asked who does what day to day: there is no separate DevOps or PM role. Infra is split —</a:t>
+            </a:r>
+          </a:p>
+          <a:p>
+            <a:r>
+              <a:t>docker-compose sits with Fullstack, CI with Tech Lead — and Definition-of-Done tracking sits with QA.</a:t>
+            </a:r>
+          </a:p>
+          <a:p>
+            <a:r>
+              <a:t>We know the gap: there is no deploy runbook yet, and it has to exist before the M7 release. Product definition is co-held by Moeun and Sothea, so PRD and FR sign-off is</a:t>
+            </a:r>
+          </a:p>
+          <a:p>
+            <a:r>
+              <a:t>not one person's signature. Tech Lead still holds Security, which concentrates approval there;</a:t>
+            </a:r>
+          </a:p>
+          <a:p>
+            <a:r>
+              <a:t>QA sign-off is kept independent for exactly that reason.</a:t>
             </a:r>
           </a:p>
         </p:txBody>
@@ -5433,7 +5448,7 @@
                 </a:solidFill>
                 <a:latin typeface="Helvetica Neue"/>
               </a:rPr>
-              <a:t>SMS OTP cost and deliverability — fallback provider identified</a:t>
+              <a:t>Auth switched to Google Sign-In — donor phone numbers now unverified</a:t>
             </a:r>
           </a:p>
         </p:txBody>
@@ -5641,7 +5656,7 @@
                 </a:solidFill>
                 <a:latin typeface="Helvetica Neue"/>
               </a:rPr>
-              <a:t>Tech Lead · Flutter · also PO, PM, Security</a:t>
+              <a:t>Tech Lead · Flutter · also PO, Security · CI</a:t>
             </a:r>
           </a:p>
           <a:p>
@@ -5666,7 +5681,7 @@
                 </a:solidFill>
                 <a:latin typeface="Helvetica Neue"/>
               </a:rPr>
-              <a:t>Backend · PostgreSQL · Flyway · matching logic</a:t>
+              <a:t>Backend · PostgreSQL · Flyway · matching logic · docker-compose</a:t>
             </a:r>
           </a:p>
           <a:p>
@@ -5716,7 +5731,7 @@
                 </a:solidFill>
                 <a:latin typeface="Helvetica Neue"/>
               </a:rPr>
-              <a:t>DevOps · Docker · CI · release pipeline</a:t>
+              <a:t>PO · PRD · briefs · wireframes · feature registry</a:t>
             </a:r>
           </a:p>
           <a:p>
@@ -7976,7 +7991,7 @@
                 </a:solidFill>
                 <a:latin typeface="Helvetica Neue"/>
               </a:rPr>
-              <a:t>Auth (phone/OTP) + donor register incl. FCM token registration: API, Flutter screen, web port…</a:t>
+              <a:t>Auth (Google Sign-In) + donor register incl. FCM token registration: API, Flutter screen, web…</a:t>
             </a:r>
           </a:p>
           <a:p>

--- a/docs/po/presentations/LifeLinkKH-v1.pptx
+++ b/docs/po/presentations/LifeLinkKH-v1.pptx
@@ -632,17 +632,22 @@
           </a:p>
           <a:p>
             <a:r>
-              <a:t>ANSWER: We registered a feature specifically for it — event capture is a delivery</a:t>
-            </a:r>
-          </a:p>
-          <a:p>
-            <a:r>
-              <a:t>requirement on every milestone from M3 onward, not something bolted on at the end. Events</a:t>
-            </a:r>
-          </a:p>
-          <a:p>
-            <a:r>
-              <a:t>we do not record while they happen are gone.</a:t>
+              <a:t>ANSWER: With SQL COUNT queries against the pilot database at demo time. We originally planned</a:t>
+            </a:r>
+          </a:p>
+          <a:p>
+            <a:r>
+              <a:t>event-capture instrumentation on every milestone and cut it — for a pilot this size the</a:t>
+            </a:r>
+          </a:p>
+          <a:p>
+            <a:r>
+              <a:t>queries give the same five numbers for none of the build cost. Be honest about the limit: if</a:t>
+            </a:r>
+          </a:p>
+          <a:p>
+            <a:r>
+              <a:t>pilot data is thin, these stay targets rather than results.</a:t>
             </a:r>
           </a:p>
         </p:txBody>
@@ -873,12 +878,17 @@
           <a:p/>
           <a:p>
             <a:r>
-              <a:t>If asked who does what day to day: there is no separate DevOps or PM role. Infra is split —</a:t>
-            </a:r>
-          </a:p>
-          <a:p>
-            <a:r>
-              <a:t>docker-compose sits with Fullstack, CI with Tech Lead — and Definition-of-Done tracking sits with QA.</a:t>
+              <a:t>If asked who does what day to day: there is no separate DevOps or PM role. Tech Lead absorbed that</a:t>
+            </a:r>
+          </a:p>
+          <a:p>
+            <a:r>
+              <a:t>work — Docker, CI, deploy, release. Definition-of-Done tracking deliberately stayed with QA, because</a:t>
+            </a:r>
+          </a:p>
+          <a:p>
+            <a:r>
+              <a:t>with Tech Lead also holding Security and co-PO, QA is the only gate outside one person.</a:t>
             </a:r>
           </a:p>
           <a:p>
@@ -1505,22 +1515,70 @@
           <a:p/>
           <a:p>
             <a:r>
-              <a:t>The seven added features are the strongest evidence. Each one closes a promise the PRD made</a:t>
-            </a:r>
-          </a:p>
-          <a:p>
-            <a:r>
-              <a:t>in prose but never turned into a requirement — for example, the PRD says users may request</a:t>
-            </a:r>
-          </a:p>
-          <a:p>
-            <a:r>
-              <a:t>deletion of their data, and no feature provided it. We found those by reading our own</a:t>
-            </a:r>
-          </a:p>
-          <a:p>
-            <a:r>
-              <a:t>document adversarially.</a:t>
+              <a:t>Two things to say here, in this order.</a:t>
+            </a:r>
+          </a:p>
+          <a:p/>
+          <a:p>
+            <a:r>
+              <a:t>First, we read our own PRD adversarially and found seven promises it made in prose but never</a:t>
+            </a:r>
+          </a:p>
+          <a:p>
+            <a:r>
+              <a:t>turned into requirements — for example, it said users may request deletion of their data, and</a:t>
+            </a:r>
+          </a:p>
+          <a:p>
+            <a:r>
+              <a:t>no feature provided it. That is how the registry got to 19.</a:t>
+            </a:r>
+          </a:p>
+          <a:p/>
+          <a:p>
+            <a:r>
+              <a:t>Second, we then cut it to 8. Nineteen features across thirteen part-time weeks does not fit,</a:t>
+            </a:r>
+          </a:p>
+          <a:p>
+            <a:r>
+              <a:t>and a plan that does not fit produces eight half-finished features instead of eight working</a:t>
+            </a:r>
+          </a:p>
+          <a:p>
+            <a:r>
+              <a:t>ones. So we cut against the five things the course grades — authentication, push, GPS, a</a:t>
+            </a:r>
+          </a:p>
+          <a:p>
+            <a:r>
+              <a:t>relational database, a Play Store release — not against what we personally found interesting.</a:t>
+            </a:r>
+          </a:p>
+          <a:p/>
+          <a:p>
+            <a:r>
+              <a:t>LIKELY QUESTION: "Why isn't feature X in your app?"</a:t>
+            </a:r>
+          </a:p>
+          <a:p>
+            <a:r>
+              <a:t>ANSWER: It probably is in docs/scope.md, with the reason. Name one deliberately: account and</a:t>
+            </a:r>
+          </a:p>
+          <a:p>
+            <a:r>
+              <a:t>data deletion is deferred, and we flag it as a privacy obligation rather than a feature — it</a:t>
+            </a:r>
+          </a:p>
+          <a:p>
+            <a:r>
+              <a:t>is only acceptable because the pilot runs on our own test accounts, and it comes back first</a:t>
+            </a:r>
+          </a:p>
+          <a:p>
+            <a:r>
+              <a:t>if a real donor ever uses this.</a:t>
             </a:r>
           </a:p>
           <a:p/>
@@ -4866,7 +4924,7 @@
                 </a:solidFill>
                 <a:latin typeface="Helvetica Neue"/>
               </a:rPr>
-              <a:t>Cross-Platform Mobile App Development · Track B · Week 2 of 16</a:t>
+              <a:t>Group 2 · Cross-Platform Mobile App Development · Track B · Week 2 of 16</a:t>
             </a:r>
           </a:p>
         </p:txBody>
@@ -5174,7 +5232,7 @@
                 </a:solidFill>
                 <a:latin typeface="Helvetica Neue"/>
               </a:rPr>
-              <a:t>LifeLink KH · Track B team product · Week 2 of 16</a:t>
+              <a:t>LifeLink KH · Group 2 · Track B · Week 2 of 16</a:t>
             </a:r>
           </a:p>
         </p:txBody>
@@ -5348,7 +5406,7 @@
                 </a:solidFill>
                 <a:latin typeface="Helvetica Neue"/>
               </a:rPr>
-              <a:t>7 product decisions still open — 3 of them gate M4 matching</a:t>
+              <a:t>Two decisions still open: notified-donor count, deploy runbook</a:t>
             </a:r>
           </a:p>
           <a:p>
@@ -5373,7 +5431,7 @@
                 </a:solidFill>
                 <a:latin typeface="Helvetica Neue"/>
               </a:rPr>
-              <a:t>Donor location precision undecided: privacy versus matching accuracy</a:t>
+              <a:t>M4 still heaviest — now three weeks, cut order agreed</a:t>
             </a:r>
           </a:p>
           <a:p>
@@ -5398,7 +5456,7 @@
                 </a:solidFill>
                 <a:latin typeface="Helvetica Neue"/>
               </a:rPr>
-              <a:t>M4 is now our heaviest milestone; cut order agreed in advance</a:t>
+              <a:t>Low donor density — zero-match fallback deferred, so unmitigated</a:t>
             </a:r>
           </a:p>
           <a:p>
@@ -5423,7 +5481,7 @@
                 </a:solidFill>
                 <a:latin typeface="Helvetica Neue"/>
               </a:rPr>
-              <a:t>Low donor density early — mitigated by campus and NGO drives</a:t>
+              <a:t>Auth switched to Google Sign-In — phone numbers now unverified</a:t>
             </a:r>
           </a:p>
           <a:p>
@@ -5448,7 +5506,7 @@
                 </a:solidFill>
                 <a:latin typeface="Helvetica Neue"/>
               </a:rPr>
-              <a:t>Auth switched to Google Sign-In — donor phone numbers now unverified</a:t>
+              <a:t>Data deletion deferred — must ship before any real donor</a:t>
             </a:r>
           </a:p>
         </p:txBody>
@@ -5482,7 +5540,7 @@
                 </a:solidFill>
                 <a:latin typeface="Helvetica Neue"/>
               </a:rPr>
-              <a:t>LifeLink KH · Track B team product · Week 2 of 16</a:t>
+              <a:t>LifeLink KH · Group 2 · Track B · Week 2 of 16</a:t>
             </a:r>
           </a:p>
         </p:txBody>
@@ -5656,7 +5714,7 @@
                 </a:solidFill>
                 <a:latin typeface="Helvetica Neue"/>
               </a:rPr>
-              <a:t>Tech Lead · Flutter · also PO, Security · CI</a:t>
+              <a:t>Tech Lead · Flutter · also PO, Security · Docker, CI, release</a:t>
             </a:r>
           </a:p>
           <a:p>
@@ -5681,7 +5739,7 @@
                 </a:solidFill>
                 <a:latin typeface="Helvetica Neue"/>
               </a:rPr>
-              <a:t>Backend · PostgreSQL · Flyway · matching logic · docker-compose</a:t>
+              <a:t>Backend · PostgreSQL · Flyway · matching logic</a:t>
             </a:r>
           </a:p>
           <a:p>
@@ -5843,7 +5901,7 @@
                 </a:solidFill>
                 <a:latin typeface="Helvetica Neue"/>
               </a:rPr>
-              <a:t>LifeLink KH · Track B team product · Week 2 of 16</a:t>
+              <a:t>LifeLink KH · Group 2 · Track B · Week 2 of 16</a:t>
             </a:r>
           </a:p>
         </p:txBody>
@@ -6151,7 +6209,7 @@
                 </a:solidFill>
                 <a:latin typeface="Helvetica Neue"/>
               </a:rPr>
-              <a:t>LifeLink KH · Track B team product · Week 2 of 16</a:t>
+              <a:t>LifeLink KH · Group 2 · Track B · Week 2 of 16</a:t>
             </a:r>
           </a:p>
         </p:txBody>
@@ -6459,7 +6517,7 @@
                 </a:solidFill>
                 <a:latin typeface="Helvetica Neue"/>
               </a:rPr>
-              <a:t>LifeLink KH · Track B team product · Week 2 of 16</a:t>
+              <a:t>LifeLink KH · Group 2 · Track B · Week 2 of 16</a:t>
             </a:r>
           </a:p>
         </p:txBody>
@@ -6767,7 +6825,7 @@
                 </a:solidFill>
                 <a:latin typeface="Helvetica Neue"/>
               </a:rPr>
-              <a:t>LifeLink KH · Track B team product · Week 2 of 16</a:t>
+              <a:t>LifeLink KH · Group 2 · Track B · Week 2 of 16</a:t>
             </a:r>
           </a:p>
         </p:txBody>
@@ -7059,7 +7117,7 @@
                 </a:solidFill>
                 <a:latin typeface="Helvetica Neue"/>
               </a:rPr>
-              <a:t>LifeLink KH · Track B team product · Week 2 of 16</a:t>
+              <a:t>LifeLink KH · Group 2 · Track B · Week 2 of 16</a:t>
             </a:r>
           </a:p>
         </p:txBody>
@@ -7389,7 +7447,7 @@
                 </a:solidFill>
                 <a:latin typeface="Helvetica Neue"/>
               </a:rPr>
-              <a:t>Infra   </a:t>
+              <a:t>Local dev + CI   </a:t>
             </a:r>
             <a:r>
               <a:rPr sz="1500" b="0">
@@ -7432,7 +7490,7 @@
                 </a:solidFill>
                 <a:latin typeface="Helvetica Neue"/>
               </a:rPr>
-              <a:t>LifeLink KH · Track B team product · Week 2 of 16</a:t>
+              <a:t>LifeLink KH · Group 2 · Track B · Week 2 of 16</a:t>
             </a:r>
           </a:p>
         </p:txBody>
@@ -7606,7 +7664,7 @@
                 </a:solidFill>
                 <a:latin typeface="Helvetica Neue"/>
               </a:rPr>
-              <a:t>19 features registered, each with an ID, area, priority, milestone</a:t>
+              <a:t>19 features registered — 8 in the build, 8 deliberately deferred</a:t>
             </a:r>
           </a:p>
           <a:p>
@@ -7631,7 +7689,7 @@
                 </a:solidFill>
                 <a:latin typeface="Helvetica Neue"/>
               </a:rPr>
-              <a:t>12 accepted from the PRD · 7 added to close documented gaps</a:t>
+              <a:t>Cut against what the course grades, not what interests us</a:t>
             </a:r>
           </a:p>
           <a:p>
@@ -7706,7 +7764,7 @@
                 </a:solidFill>
                 <a:latin typeface="Helvetica Neue"/>
               </a:rPr>
-              <a:t>Open product questions tracked as briefs, with the milestone each blocks</a:t>
+              <a:t>Deferred features keep their documents — that is our future work</a:t>
             </a:r>
           </a:p>
         </p:txBody>
@@ -7740,7 +7798,7 @@
                 </a:solidFill>
                 <a:latin typeface="Helvetica Neue"/>
               </a:rPr>
-              <a:t>LifeLink KH · Track B team product · Week 2 of 16</a:t>
+              <a:t>LifeLink KH · Group 2 · Track B · Week 2 of 16</a:t>
             </a:r>
           </a:p>
         </p:txBody>
@@ -7923,7 +7981,7 @@
                 </a:solidFill>
                 <a:latin typeface="Helvetica Neue"/>
               </a:rPr>
-              <a:t>PRD + wireframes, DB schema/ERD, API spec, repo + Docker skeleton</a:t>
+              <a:t>ERD (done), wireframes for the 4 core screens only, API spec for the 8 core FRs</a:t>
             </a:r>
           </a:p>
           <a:p>
@@ -7982,7 +8040,7 @@
                 </a:solidFill>
                 <a:latin typeface="Helvetica Neue"/>
               </a:rPr>
-              <a:t>W7-8      </a:t>
+              <a:t>W7-9      </a:t>
             </a:r>
             <a:r>
               <a:rPr sz="1500" b="0">
@@ -7991,7 +8049,7 @@
                 </a:solidFill>
                 <a:latin typeface="Helvetica Neue"/>
               </a:rPr>
-              <a:t>Auth (Google Sign-In) + donor register incl. FCM token registration: API, Flutter screen, web…</a:t>
+              <a:t>Google Sign-In + donor register + FCM token registration end-to-end (feature 1)</a:t>
             </a:r>
           </a:p>
           <a:p>
@@ -8016,7 +8074,7 @@
                 </a:solidFill>
                 <a:latin typeface="Helvetica Neue"/>
               </a:rPr>
-              <a:t>W9-10     </a:t>
+              <a:t>W10-12    </a:t>
             </a:r>
             <a:r>
               <a:rPr sz="1500" b="0">
@@ -8025,7 +8083,7 @@
                 </a:solidFill>
                 <a:latin typeface="Helvetica Neue"/>
               </a:rPr>
-              <a:t>Urgent request create + matching by blood type/distance + 56-day eligibility computation + FC…</a:t>
+              <a:t>Request create + ABO/Rh and distance matching + eligibility computation + request-alert push…</a:t>
             </a:r>
           </a:p>
           <a:p>
@@ -8050,7 +8108,7 @@
                 </a:solidFill>
                 <a:latin typeface="Helvetica Neue"/>
               </a:rPr>
-              <a:t>W11-12    </a:t>
+              <a:t>W13       </a:t>
             </a:r>
             <a:r>
               <a:rPr sz="1500" b="0">
@@ -8059,7 +8117,7 @@
                 </a:solidFill>
                 <a:latin typeface="Helvetica Neue"/>
               </a:rPr>
-              <a:t>Donation history + donor eligibility status + eligibility reminder push (feature 3)</a:t>
+              <a:t>Donation history list + 56-day eligibility status + the single hospital web page (feature 3)</a:t>
             </a:r>
           </a:p>
           <a:p>
@@ -8084,7 +8142,7 @@
                 </a:solidFill>
                 <a:latin typeface="Helvetica Neue"/>
               </a:rPr>
-              <a:t>W13       </a:t>
+              <a:t>W14       </a:t>
             </a:r>
             <a:r>
               <a:rPr sz="1500" b="0">
@@ -8093,7 +8151,7 @@
                 </a:solidFill>
                 <a:latin typeface="Helvetica Neue"/>
               </a:rPr>
-              <a:t>GPS/maps in Flutter, Khmer/English i18n, web portal polish, Android build</a:t>
+              <a:t>GPS via geolocator, Khmer/English i18n, Android build, bug fix</a:t>
             </a:r>
           </a:p>
           <a:p>
@@ -8118,7 +8176,7 @@
                 </a:solidFill>
                 <a:latin typeface="Helvetica Neue"/>
               </a:rPr>
-              <a:t>W14-15    </a:t>
+              <a:t>W15       </a:t>
             </a:r>
             <a:r>
               <a:rPr sz="1500" b="1">
@@ -8469,7 +8527,7 @@
                 </a:solidFill>
                 <a:latin typeface="Helvetica Neue"/>
               </a:rPr>
-              <a:t>LifeLink KH · Track B team product · Week 2 of 16</a:t>
+              <a:t>LifeLink KH · Group 2 · Track B · Week 2 of 16</a:t>
             </a:r>
           </a:p>
         </p:txBody>

--- a/docs/po/presentations/LifeLinkKH-v1.pptx
+++ b/docs/po/presentations/LifeLinkKH-v1.pptx
@@ -17,7 +17,6 @@
     <p:sldId id="265" r:id="rId17"/>
     <p:sldId id="266" r:id="rId18"/>
     <p:sldId id="267" r:id="rId19"/>
-    <p:sldId id="268" r:id="rId20"/>
   </p:sldIdLst>
   <p:sldSz cx="12191695" cy="6858000" type="screen4x3"/>
   <p:notesSz cx="6858000" cy="9144000"/>
@@ -600,49 +599,55 @@
           <a:lstStyle/>
           <a:p>
             <a:r>
-              <a:t>Be straight about this. We have documentation and specifications, not running code. Week 2</a:t>
-            </a:r>
-          </a:p>
-          <a:p>
-            <a:r>
-              <a:t>of 16 is the right time to have exactly that.</a:t>
+              <a:t>Five numbers, all from the PRD. These are targets we set, not results we have.</a:t>
             </a:r>
           </a:p>
           <a:p/>
           <a:p>
             <a:r>
-              <a:t>What the M2 specs contain: the Flutter project structure and state-management choice, the</a:t>
-            </a:r>
-          </a:p>
-          <a:p>
-            <a:r>
-              <a:t>Spring Boot package layout and the initial database migration covering all six entities,</a:t>
-            </a:r>
-          </a:p>
-          <a:p>
-            <a:r>
-              <a:t>the Next.js routing and localization approach, and the Docker Compose service definitions.</a:t>
-            </a:r>
-          </a:p>
-          <a:p>
-            <a:r>
-              <a:t>Each has a checklist a reviewer can pass or fail without asking us anything.</a:t>
+              <a:t>The important one is the third: median time to first acceptance. It is the number that says</a:t>
+            </a:r>
+          </a:p>
+          <a:p>
+            <a:r>
+              <a:t>whether we actually beat a Facebook post, and it is the reason the app exists.</a:t>
             </a:r>
           </a:p>
           <a:p/>
           <a:p>
             <a:r>
-              <a:t>LIKELY QUESTION: "Can you show us the app?"</a:t>
-            </a:r>
-          </a:p>
-          <a:p>
-            <a:r>
-              <a:t>ANSWER: No, and we would rather say so than show a mockup that implies working software.</a:t>
-            </a:r>
-          </a:p>
-          <a:p>
-            <a:r>
-              <a:t>What we can show is the specification the build will be checked against.</a:t>
+              <a:t>Note that hospital-verified matters in the fourth metric. A self-reported donation is not</a:t>
+            </a:r>
+          </a:p>
+          <a:p>
+            <a:r>
+              <a:t>evidence; a donation confirmed by hospital staff is.</a:t>
+            </a:r>
+          </a:p>
+          <a:p/>
+          <a:p>
+            <a:r>
+              <a:t>LIKELY QUESTION: "How will you measure these?"</a:t>
+            </a:r>
+          </a:p>
+          <a:p>
+            <a:r>
+              <a:t>ANSWER: With SQL COUNT queries against the pilot database at demo time. We originally planned</a:t>
+            </a:r>
+          </a:p>
+          <a:p>
+            <a:r>
+              <a:t>event-capture instrumentation on every milestone and cut it — for a pilot this size the</a:t>
+            </a:r>
+          </a:p>
+          <a:p>
+            <a:r>
+              <a:t>queries give the same five numbers for none of the build cost. Be honest about the limit: if</a:t>
+            </a:r>
+          </a:p>
+          <a:p>
+            <a:r>
+              <a:t>pilot data is thin, these stay targets rather than results.</a:t>
             </a:r>
           </a:p>
         </p:txBody>
@@ -712,55 +717,70 @@
           <a:lstStyle/>
           <a:p>
             <a:r>
-              <a:t>Five numbers, all from the PRD. These are targets we set, not results we have.</a:t>
+              <a:t>Most Week-2 decks hide what they do not know. This slide is deliberate — it is the one that</a:t>
+            </a:r>
+          </a:p>
+          <a:p>
+            <a:r>
+              <a:t>shows the plan is real.</a:t>
             </a:r>
           </a:p>
           <a:p/>
           <a:p>
             <a:r>
-              <a:t>The important one is the third: median time to first acceptance. It is the number that says</a:t>
-            </a:r>
-          </a:p>
-          <a:p>
-            <a:r>
-              <a:t>whether we actually beat a Facebook post, and it is the reason the app exists.</a:t>
+              <a:t>On location precision: storing exact coordinates gives accurate distance ranking but holds</a:t>
+            </a:r>
+          </a:p>
+          <a:p>
+            <a:r>
+              <a:t>sensitive personal data; a district centroid is safer but less accurate. It is simultaneously</a:t>
+            </a:r>
+          </a:p>
+          <a:p>
+            <a:r>
+              <a:t>a privacy decision and a product decision, and it changes the database schema, so we are</a:t>
+            </a:r>
+          </a:p>
+          <a:p>
+            <a:r>
+              <a:t>deciding it before we write the migration rather than after.</a:t>
             </a:r>
           </a:p>
           <a:p/>
           <a:p>
             <a:r>
-              <a:t>Note that hospital-verified matters in the fourth metric. A self-reported donation is not</a:t>
-            </a:r>
-          </a:p>
-          <a:p>
-            <a:r>
-              <a:t>evidence; a donation confirmed by hospital staff is.</a:t>
+              <a:t>On M4: we found that matching was scheduled before the eligibility check it depends on, and</a:t>
+            </a:r>
+          </a:p>
+          <a:p>
+            <a:r>
+              <a:t>that push notification was scheduled after the feature that triggers it. We moved both</a:t>
+            </a:r>
+          </a:p>
+          <a:p>
+            <a:r>
+              <a:t>earlier rather than let a milestone close with its own acceptance criteria unmet. That made</a:t>
+            </a:r>
+          </a:p>
+          <a:p>
+            <a:r>
+              <a:t>M4 heavy, so we agreed in advance which two features get cut first if it slips.</a:t>
             </a:r>
           </a:p>
           <a:p/>
           <a:p>
             <a:r>
-              <a:t>LIKELY QUESTION: "How will you measure these?"</a:t>
-            </a:r>
-          </a:p>
-          <a:p>
-            <a:r>
-              <a:t>ANSWER: With SQL COUNT queries against the pilot database at demo time. We originally planned</a:t>
-            </a:r>
-          </a:p>
-          <a:p>
-            <a:r>
-              <a:t>event-capture instrumentation on every milestone and cut it — for a pilot this size the</a:t>
-            </a:r>
-          </a:p>
-          <a:p>
-            <a:r>
-              <a:t>queries give the same five numbers for none of the build cost. Be honest about the limit: if</a:t>
-            </a:r>
-          </a:p>
-          <a:p>
-            <a:r>
-              <a:t>pilot data is thin, these stay targets rather than results.</a:t>
+              <a:t>LIKELY QUESTION: "Isn't it a problem that so much is undecided?"</a:t>
+            </a:r>
+          </a:p>
+          <a:p>
+            <a:r>
+              <a:t>ANSWER: These are written down with the milestone each one blocks and the date it must be</a:t>
+            </a:r>
+          </a:p>
+          <a:p>
+            <a:r>
+              <a:t>resolved. The alternative is not fewer unknowns — it is the same unknowns, undocumented.</a:t>
             </a:r>
           </a:p>
         </p:txBody>
@@ -830,139 +850,6 @@
           <a:lstStyle/>
           <a:p>
             <a:r>
-              <a:t>Most Week-2 decks hide what they do not know. This slide is deliberate — it is the one that</a:t>
-            </a:r>
-          </a:p>
-          <a:p>
-            <a:r>
-              <a:t>shows the plan is real.</a:t>
-            </a:r>
-          </a:p>
-          <a:p/>
-          <a:p>
-            <a:r>
-              <a:t>On location precision: storing exact coordinates gives accurate distance ranking but holds</a:t>
-            </a:r>
-          </a:p>
-          <a:p>
-            <a:r>
-              <a:t>sensitive personal data; a district centroid is safer but less accurate. It is simultaneously</a:t>
-            </a:r>
-          </a:p>
-          <a:p>
-            <a:r>
-              <a:t>a privacy decision and a product decision, and it changes the database schema, so we are</a:t>
-            </a:r>
-          </a:p>
-          <a:p>
-            <a:r>
-              <a:t>deciding it before we write the migration rather than after.</a:t>
-            </a:r>
-          </a:p>
-          <a:p/>
-          <a:p>
-            <a:r>
-              <a:t>On M4: we found that matching was scheduled before the eligibility check it depends on, and</a:t>
-            </a:r>
-          </a:p>
-          <a:p>
-            <a:r>
-              <a:t>that push notification was scheduled after the feature that triggers it. We moved both</a:t>
-            </a:r>
-          </a:p>
-          <a:p>
-            <a:r>
-              <a:t>earlier rather than let a milestone close with its own acceptance criteria unmet. That made</a:t>
-            </a:r>
-          </a:p>
-          <a:p>
-            <a:r>
-              <a:t>M4 heavy, so we agreed in advance which two features get cut first if it slips.</a:t>
-            </a:r>
-          </a:p>
-          <a:p/>
-          <a:p>
-            <a:r>
-              <a:t>LIKELY QUESTION: "Isn't it a problem that so much is undecided?"</a:t>
-            </a:r>
-          </a:p>
-          <a:p>
-            <a:r>
-              <a:t>ANSWER: These are written down with the milestone each one blocks and the date it must be</a:t>
-            </a:r>
-          </a:p>
-          <a:p>
-            <a:r>
-              <a:t>resolved. The alternative is not fewer unknowns — it is the same unknowns, undocumented.</a:t>
-            </a:r>
-          </a:p>
-        </p:txBody>
-      </p:sp>
-      <p:sp>
-        <p:nvSpPr>
-          <p:cNvPr id="4" name="Slide Number Placeholder 3"/>
-          <p:cNvSpPr>
-            <a:spLocks noGrp="1"/>
-          </p:cNvSpPr>
-          <p:nvPr>
-            <p:ph type="sldNum" idx="5" sz="quarter"/>
-          </p:nvPr>
-        </p:nvSpPr>
-        <p:spPr/>
-      </p:sp>
-    </p:spTree>
-  </p:cSld>
-  <p:clrMapOvr>
-    <a:masterClrMapping/>
-  </p:clrMapOvr>
-</p:notes>
-</file>
-
-<file path=ppt/notesSlides/notesSlide13.xml><?xml version="1.0" encoding="utf-8"?>
-<p:notes xmlns:a="http://schemas.openxmlformats.org/drawingml/2006/main" xmlns:p="http://schemas.openxmlformats.org/presentationml/2006/main" xmlns:r="http://schemas.openxmlformats.org/officeDocument/2006/relationships">
-  <p:cSld>
-    <p:spTree>
-      <p:nvGrpSpPr>
-        <p:cNvPr id="1" name=""/>
-        <p:cNvGrpSpPr/>
-        <p:nvPr/>
-      </p:nvGrpSpPr>
-      <p:grpSpPr>
-        <a:xfrm>
-          <a:off x="0" y="0"/>
-          <a:ext cx="0" cy="0"/>
-          <a:chOff x="0" y="0"/>
-          <a:chExt cx="0" cy="0"/>
-        </a:xfrm>
-      </p:grpSpPr>
-      <p:sp>
-        <p:nvSpPr>
-          <p:cNvPr id="2" name="Slide Image Placeholder 1"/>
-          <p:cNvSpPr>
-            <a:spLocks noGrp="1"/>
-          </p:cNvSpPr>
-          <p:nvPr>
-            <p:ph type="sldImg" idx="2"/>
-          </p:nvPr>
-        </p:nvSpPr>
-        <p:spPr/>
-      </p:sp>
-      <p:sp>
-        <p:nvSpPr>
-          <p:cNvPr id="3" name="Notes Placeholder 2"/>
-          <p:cNvSpPr>
-            <a:spLocks noGrp="1"/>
-          </p:cNvSpPr>
-          <p:nvPr>
-            <p:ph type="body" idx="3" sz="quarter"/>
-          </p:nvPr>
-        </p:nvSpPr>
-        <p:spPr/>
-        <p:txBody>
-          <a:bodyPr/>
-          <a:lstStyle/>
-          <a:p>
-            <a:r>
               <a:t>End on the question, not on thanks. Ask it directly and then stop talking.</a:t>
             </a:r>
           </a:p>
@@ -1783,75 +1670,34 @@
           <a:lstStyle/>
           <a:p>
             <a:r>
-              <a:t>This is the hand-off slide, not the demo itself. Say one sentence and switch devices:</a:t>
-            </a:r>
-          </a:p>
-          <a:p>
-            <a:r>
-              <a:t>"Rather than describe it, let me show it" — then tab away from the deck.</a:t>
+              <a:t>Do not read all seven aloud. Name three: M2 is the stack running under Docker, M4 is the</a:t>
+            </a:r>
+          </a:p>
+          <a:p>
+            <a:r>
+              <a:t>core matching feature end to end, M7 is published to Play Store internal testing by Week 15.</a:t>
             </a:r>
           </a:p>
           <a:p/>
           <a:p>
             <a:r>
-              <a:t>Everything said out loud from here follows docs/po/demo-script.md, not this slide. That</a:t>
-            </a:r>
-          </a:p>
-          <a:p>
-            <a:r>
-              <a:t>file has the full narration, plus ready answers for the questions people actually ask</a:t>
-            </a:r>
-          </a:p>
-          <a:p>
-            <a:r>
-              <a:t>mid-demo (why a phone app and not a website, what happens if nobody accepts, why there's</a:t>
-            </a:r>
-          </a:p>
-          <a:p>
-            <a:r>
-              <a:t>no map). This slide exists so the deck doesn't go straight from "here's our scope" to "any</a:t>
-            </a:r>
-          </a:p>
-          <a:p>
-            <a:r>
-              <a:t>questions" with no visible proof in between.</a:t>
+              <a:t>M7 is the assignment's hard requirement, so say the words "internal testing" explicitly.</a:t>
             </a:r>
           </a:p>
           <a:p/>
           <a:p>
             <a:r>
-              <a:t>Fallback if the live app cannot run in the room (no network, no projector HDMI for a</a:t>
-            </a:r>
-          </a:p>
-          <a:p>
-            <a:r>
-              <a:t>device, borrowed machine): docs/demo-runbook.md's golden path is short enough to walk</a:t>
-            </a:r>
-          </a:p>
-          <a:p>
-            <a:r>
-              <a:t>through as a screen-recording instead. Have one ready; do not discover you need it live.</a:t>
-            </a:r>
-          </a:p>
-          <a:p/>
-          <a:p>
-            <a:r>
-              <a:t>LIKELY QUESTION: "What if the demo breaks?"</a:t>
-            </a:r>
-          </a:p>
-          <a:p>
-            <a:r>
-              <a:t>ANSWER: Say so plainly rather than fighting it in front of the room, then either retry</a:t>
-            </a:r>
-          </a:p>
-          <a:p>
-            <a:r>
-              <a:t>once or switch to the fallback recording. A visible recovery reads better than a</a:t>
-            </a:r>
-          </a:p>
-          <a:p>
-            <a:r>
-              <a:t>stalled silence.</a:t>
+              <a:t>This table is generated from our planning document, not retyped — which is why it cannot</a:t>
+            </a:r>
+          </a:p>
+          <a:p>
+            <a:r>
+              <a:t>disagree with the plan. We changed three milestone rows this week when we found that</a:t>
+            </a:r>
+          </a:p>
+          <a:p>
+            <a:r>
+              <a:t>matching was scheduled before the eligibility check it depends on. Slide 11 covers that.</a:t>
             </a:r>
           </a:p>
         </p:txBody>
@@ -1921,34 +1767,49 @@
           <a:lstStyle/>
           <a:p>
             <a:r>
-              <a:t>Do not read all seven aloud. Name three: M2 is the stack running under Docker, M4 is the</a:t>
-            </a:r>
-          </a:p>
-          <a:p>
-            <a:r>
-              <a:t>core matching feature end to end, M7 is published to Play Store internal testing by Week 15.</a:t>
+              <a:t>Be straight about this. We have documentation and specifications, not running code. Week 2</a:t>
+            </a:r>
+          </a:p>
+          <a:p>
+            <a:r>
+              <a:t>of 16 is the right time to have exactly that.</a:t>
             </a:r>
           </a:p>
           <a:p/>
           <a:p>
             <a:r>
-              <a:t>M7 is the assignment's hard requirement, so say the words "internal testing" explicitly.</a:t>
+              <a:t>What the M2 specs contain: the Flutter project structure and state-management choice, the</a:t>
+            </a:r>
+          </a:p>
+          <a:p>
+            <a:r>
+              <a:t>Spring Boot package layout and the initial database migration covering all six entities,</a:t>
+            </a:r>
+          </a:p>
+          <a:p>
+            <a:r>
+              <a:t>the Next.js routing and localization approach, and the Docker Compose service definitions.</a:t>
+            </a:r>
+          </a:p>
+          <a:p>
+            <a:r>
+              <a:t>Each has a checklist a reviewer can pass or fail without asking us anything.</a:t>
             </a:r>
           </a:p>
           <a:p/>
           <a:p>
             <a:r>
-              <a:t>This table is generated from our planning document, not retyped — which is why it cannot</a:t>
-            </a:r>
-          </a:p>
-          <a:p>
-            <a:r>
-              <a:t>disagree with the plan. We changed three milestone rows this week when we found that</a:t>
-            </a:r>
-          </a:p>
-          <a:p>
-            <a:r>
-              <a:t>matching was scheduled before the eligibility check it depends on. Slide 11 covers that.</a:t>
+              <a:t>LIKELY QUESTION: "Can you show us the app?"</a:t>
+            </a:r>
+          </a:p>
+          <a:p>
+            <a:r>
+              <a:t>ANSWER: No, and we would rather say so than show a mockup that implies working software.</a:t>
+            </a:r>
+          </a:p>
+          <a:p>
+            <a:r>
+              <a:t>What we can show is the specification the build will be checked against.</a:t>
             </a:r>
           </a:p>
         </p:txBody>
@@ -5123,7 +4984,7 @@
                 </a:solidFill>
                 <a:latin typeface="Helvetica Neue"/>
               </a:rPr>
-              <a:t>WHEN</a:t>
+              <a:t>MEASURE</a:t>
             </a:r>
           </a:p>
           <a:p>
@@ -5134,7 +4995,7 @@
                 </a:solidFill>
                 <a:latin typeface="Noto Sans Khmer"/>
               </a:rPr>
-              <a:t>ស្ថានភាពបច្ចុប្បន្ន</a:t>
+              <a:t>សូចនាករជោគជ័យ</a:t>
             </a:r>
           </a:p>
           <a:p>
@@ -5145,7 +5006,7 @@
                 </a:solidFill>
                 <a:latin typeface="Helvetica Neue"/>
               </a:rPr>
-              <a:t>Where We Are Today</a:t>
+              <a:t>Success Metrics</a:t>
             </a:r>
           </a:p>
         </p:txBody>
@@ -5237,7 +5098,7 @@
                 </a:solidFill>
                 <a:latin typeface="Helvetica Neue"/>
               </a:rPr>
-              <a:t>M1 complete — PRD, feature registry, schema design, API contract skeleton</a:t>
+              <a:t>≥ 200 registered donors in Phnom Penh in the first pilot month</a:t>
             </a:r>
           </a:p>
           <a:p>
@@ -5262,7 +5123,7 @@
                 </a:solidFill>
                 <a:latin typeface="Helvetica Neue"/>
               </a:rPr>
-              <a:t>M2 specified in four layer specs, each with a pass/fail checklist</a:t>
+              <a:t>≥ 70% of urgent requests get an acceptance within 60 minutes</a:t>
             </a:r>
           </a:p>
           <a:p>
@@ -5287,7 +5148,7 @@
                 </a:solidFill>
                 <a:latin typeface="Helvetica Neue"/>
               </a:rPr>
-              <a:t>Not yet built — the three code directories are still empty</a:t>
+              <a:t>Median time from request to first acceptance under 30 minutes</a:t>
             </a:r>
           </a:p>
           <a:p>
@@ -5312,7 +5173,7 @@
                 </a:solidFill>
                 <a:latin typeface="Helvetica Neue"/>
               </a:rPr>
-              <a:t>Blocking M2: one API endpoint must reach the shared contract</a:t>
+              <a:t>≥ 50 completed, hospital-verified donations during the pilot semester</a:t>
             </a:r>
           </a:p>
           <a:p>
@@ -5337,7 +5198,7 @@
                 </a:solidFill>
                 <a:latin typeface="Helvetica Neue"/>
               </a:rPr>
-              <a:t>Next: resolve three product decisions that gate M4 matching</a:t>
+              <a:t>Push notification delivery rate ≥ 95%</a:t>
             </a:r>
           </a:p>
         </p:txBody>
@@ -5431,7 +5292,7 @@
                 </a:solidFill>
                 <a:latin typeface="Helvetica Neue"/>
               </a:rPr>
-              <a:t>MEASURE</a:t>
+              <a:t>HONEST</a:t>
             </a:r>
           </a:p>
           <a:p>
@@ -5442,7 +5303,7 @@
                 </a:solidFill>
                 <a:latin typeface="Noto Sans Khmer"/>
               </a:rPr>
-              <a:t>សូចនាករជោគជ័យ</a:t>
+              <a:t>ហានិភ័យ និងការសម្រេចចិត្ត</a:t>
             </a:r>
           </a:p>
           <a:p>
@@ -5453,7 +5314,7 @@
                 </a:solidFill>
                 <a:latin typeface="Helvetica Neue"/>
               </a:rPr>
-              <a:t>Success Metrics</a:t>
+              <a:t>Risks + Open Decisions</a:t>
             </a:r>
           </a:p>
         </p:txBody>
@@ -5545,7 +5406,7 @@
                 </a:solidFill>
                 <a:latin typeface="Helvetica Neue"/>
               </a:rPr>
-              <a:t>≥ 200 registered donors in Phnom Penh in the first pilot month</a:t>
+              <a:t>Two decisions still open: notified-donor count, deploy runbook</a:t>
             </a:r>
           </a:p>
           <a:p>
@@ -5570,7 +5431,7 @@
                 </a:solidFill>
                 <a:latin typeface="Helvetica Neue"/>
               </a:rPr>
-              <a:t>≥ 70% of urgent requests get an acceptance within 60 minutes</a:t>
+              <a:t>M4 still heaviest — now three weeks, cut order agreed</a:t>
             </a:r>
           </a:p>
           <a:p>
@@ -5595,7 +5456,7 @@
                 </a:solidFill>
                 <a:latin typeface="Helvetica Neue"/>
               </a:rPr>
-              <a:t>Median time from request to first acceptance under 30 minutes</a:t>
+              <a:t>Low donor density — zero-match fallback deferred, so unmitigated</a:t>
             </a:r>
           </a:p>
           <a:p>
@@ -5620,7 +5481,7 @@
                 </a:solidFill>
                 <a:latin typeface="Helvetica Neue"/>
               </a:rPr>
-              <a:t>≥ 50 completed, hospital-verified donations during the pilot semester</a:t>
+              <a:t>Auth switched to Google Sign-In — phone numbers now unverified</a:t>
             </a:r>
           </a:p>
           <a:p>
@@ -5645,7 +5506,7 @@
                 </a:solidFill>
                 <a:latin typeface="Helvetica Neue"/>
               </a:rPr>
-              <a:t>Push notification delivery rate ≥ 95%</a:t>
+              <a:t>Data deletion deferred — must ship before any real donor</a:t>
             </a:r>
           </a:p>
         </p:txBody>
@@ -5739,7 +5600,7 @@
                 </a:solidFill>
                 <a:latin typeface="Helvetica Neue"/>
               </a:rPr>
-              <a:t>HONEST</a:t>
+              <a:t>WHO BUILDS IT</a:t>
             </a:r>
           </a:p>
           <a:p>
@@ -5750,7 +5611,7 @@
                 </a:solidFill>
                 <a:latin typeface="Noto Sans Khmer"/>
               </a:rPr>
-              <a:t>ហានិភ័យ និងការសម្រេចចិត្ត</a:t>
+              <a:t>ក្រុមការងារ</a:t>
             </a:r>
           </a:p>
           <a:p>
@@ -5761,7 +5622,7 @@
                 </a:solidFill>
                 <a:latin typeface="Helvetica Neue"/>
               </a:rPr>
-              <a:t>Risks + Open Decisions</a:t>
+              <a:t>Team + One Open Question</a:t>
             </a:r>
           </a:p>
         </p:txBody>
@@ -5818,8 +5679,8 @@
         </p:nvSpPr>
         <p:spPr>
           <a:xfrm>
-            <a:off x="822960" y="2468880"/>
-            <a:ext cx="10515600" cy="3657600"/>
+            <a:off x="822960" y="2377440"/>
+            <a:ext cx="10515600" cy="2651760"/>
           </a:xfrm>
           <a:prstGeom prst="rect">
             <a:avLst/>
@@ -5834,133 +5695,186 @@
           <a:p>
             <a:pPr>
               <a:spcAft>
-                <a:spcPts val="1400"/>
+                <a:spcPts val="1000"/>
               </a:spcAft>
             </a:pPr>
             <a:r>
               <a:rPr sz="1900" b="1">
                 <a:solidFill>
-                  <a:srgbClr val="C0212E"/>
-                </a:solidFill>
-                <a:latin typeface="Helvetica Neue"/>
-              </a:rPr>
-              <a:t>▪  </a:t>
-            </a:r>
-            <a:r>
-              <a:rPr sz="1900" b="0">
-                <a:solidFill>
                   <a:srgbClr val="1A1A2E"/>
                 </a:solidFill>
                 <a:latin typeface="Helvetica Neue"/>
               </a:rPr>
-              <a:t>Two decisions still open: notified-donor count, deploy runbook</a:t>
+              <a:t>Nem Sothea   </a:t>
+            </a:r>
+            <a:r>
+              <a:rPr sz="1500" b="0">
+                <a:solidFill>
+                  <a:srgbClr val="5A5A6E"/>
+                </a:solidFill>
+                <a:latin typeface="Helvetica Neue"/>
+              </a:rPr>
+              <a:t>Tech Lead · Flutter · also PO, Security · Docker, CI, release</a:t>
             </a:r>
           </a:p>
           <a:p>
             <a:pPr>
               <a:spcAft>
-                <a:spcPts val="1400"/>
+                <a:spcPts val="1000"/>
               </a:spcAft>
             </a:pPr>
             <a:r>
               <a:rPr sz="1900" b="1">
                 <a:solidFill>
-                  <a:srgbClr val="C0212E"/>
-                </a:solidFill>
-                <a:latin typeface="Helvetica Neue"/>
-              </a:rPr>
-              <a:t>▪  </a:t>
-            </a:r>
-            <a:r>
-              <a:rPr sz="1900" b="0">
-                <a:solidFill>
                   <a:srgbClr val="1A1A2E"/>
                 </a:solidFill>
                 <a:latin typeface="Helvetica Neue"/>
               </a:rPr>
-              <a:t>M4 still heaviest — now three weeks, cut order agreed</a:t>
+              <a:t>Moeun Nithvaraman   </a:t>
+            </a:r>
+            <a:r>
+              <a:rPr sz="1500" b="0">
+                <a:solidFill>
+                  <a:srgbClr val="5A5A6E"/>
+                </a:solidFill>
+                <a:latin typeface="Helvetica Neue"/>
+              </a:rPr>
+              <a:t>Backend · PostgreSQL · Flyway · matching logic</a:t>
             </a:r>
           </a:p>
           <a:p>
             <a:pPr>
               <a:spcAft>
-                <a:spcPts val="1400"/>
+                <a:spcPts val="1000"/>
               </a:spcAft>
             </a:pPr>
             <a:r>
               <a:rPr sz="1900" b="1">
                 <a:solidFill>
-                  <a:srgbClr val="C0212E"/>
-                </a:solidFill>
-                <a:latin typeface="Helvetica Neue"/>
-              </a:rPr>
-              <a:t>▪  </a:t>
-            </a:r>
-            <a:r>
-              <a:rPr sz="1900" b="0">
-                <a:solidFill>
                   <a:srgbClr val="1A1A2E"/>
                 </a:solidFill>
                 <a:latin typeface="Helvetica Neue"/>
               </a:rPr>
-              <a:t>Low donor density — zero-match fallback deferred, so unmitigated</a:t>
+              <a:t>Suon Pisey   </a:t>
+            </a:r>
+            <a:r>
+              <a:rPr sz="1500" b="0">
+                <a:solidFill>
+                  <a:srgbClr val="5A5A6E"/>
+                </a:solidFill>
+                <a:latin typeface="Helvetica Neue"/>
+              </a:rPr>
+              <a:t>Frontend · Next.js portal · API client · i18n</a:t>
             </a:r>
           </a:p>
           <a:p>
             <a:pPr>
               <a:spcAft>
-                <a:spcPts val="1400"/>
+                <a:spcPts val="1000"/>
               </a:spcAft>
             </a:pPr>
             <a:r>
               <a:rPr sz="1900" b="1">
                 <a:solidFill>
-                  <a:srgbClr val="C0212E"/>
-                </a:solidFill>
-                <a:latin typeface="Helvetica Neue"/>
-              </a:rPr>
-              <a:t>▪  </a:t>
-            </a:r>
-            <a:r>
-              <a:rPr sz="1900" b="0">
-                <a:solidFill>
                   <a:srgbClr val="1A1A2E"/>
                 </a:solidFill>
                 <a:latin typeface="Helvetica Neue"/>
               </a:rPr>
-              <a:t>Auth switched to Google Sign-In — phone numbers now unverified</a:t>
+              <a:t>Sourn SAVOURN   </a:t>
+            </a:r>
+            <a:r>
+              <a:rPr sz="1500" b="0">
+                <a:solidFill>
+                  <a:srgbClr val="5A5A6E"/>
+                </a:solidFill>
+                <a:latin typeface="Helvetica Neue"/>
+              </a:rPr>
+              <a:t>PO · PRD · briefs · wireframes · feature registry</a:t>
             </a:r>
           </a:p>
           <a:p>
             <a:pPr>
               <a:spcAft>
-                <a:spcPts val="1400"/>
+                <a:spcPts val="1000"/>
               </a:spcAft>
             </a:pPr>
             <a:r>
               <a:rPr sz="1900" b="1">
                 <a:solidFill>
-                  <a:srgbClr val="C0212E"/>
-                </a:solidFill>
-                <a:latin typeface="Helvetica Neue"/>
-              </a:rPr>
-              <a:t>▪  </a:t>
-            </a:r>
-            <a:r>
-              <a:rPr sz="1900" b="0">
-                <a:solidFill>
                   <a:srgbClr val="1A1A2E"/>
                 </a:solidFill>
                 <a:latin typeface="Helvetica Neue"/>
               </a:rPr>
-              <a:t>Data deletion deferred — must ship before any real donor</a:t>
-            </a:r>
-          </a:p>
-        </p:txBody>
-      </p:sp>
-      <p:sp>
-        <p:nvSpPr>
-          <p:cNvPr id="5" name="TextBox 4"/>
+              <a:t>Oun Sreynich   </a:t>
+            </a:r>
+            <a:r>
+              <a:rPr sz="1500" b="0">
+                <a:solidFill>
+                  <a:srgbClr val="5A5A6E"/>
+                </a:solidFill>
+                <a:latin typeface="Helvetica Neue"/>
+              </a:rPr>
+              <a:t>QA · test plan · milestone acceptance · bug tracking</a:t>
+            </a:r>
+          </a:p>
+        </p:txBody>
+      </p:sp>
+      <p:sp>
+        <p:nvSpPr>
+          <p:cNvPr id="5" name="Rectangle 4"/>
+          <p:cNvSpPr/>
+          <p:nvPr/>
+        </p:nvSpPr>
+        <p:spPr>
+          <a:xfrm>
+            <a:off x="777240" y="5257800"/>
+            <a:ext cx="10607040" cy="777240"/>
+          </a:xfrm>
+          <a:prstGeom prst="rect">
+            <a:avLst/>
+          </a:prstGeom>
+          <a:solidFill>
+            <a:srgbClr val="0F6B5F"/>
+          </a:solidFill>
+          <a:ln>
+            <a:noFill/>
+          </a:ln>
+          <a:effectLst/>
+        </p:spPr>
+        <p:style>
+          <a:lnRef idx="1">
+            <a:schemeClr val="accent1"/>
+          </a:lnRef>
+          <a:fillRef idx="3">
+            <a:schemeClr val="accent1"/>
+          </a:fillRef>
+          <a:effectRef idx="2">
+            <a:schemeClr val="accent1"/>
+          </a:effectRef>
+          <a:fontRef idx="minor">
+            <a:schemeClr val="lt1"/>
+          </a:fontRef>
+        </p:style>
+        <p:txBody>
+          <a:bodyPr rtlCol="0" anchor="ctr" wrap="square"/>
+          <a:lstStyle/>
+          <a:p>
+            <a:pPr algn="ctr"/>
+            <a:r>
+              <a:rPr sz="1700" b="1">
+                <a:solidFill>
+                  <a:srgbClr val="FFFFFF"/>
+                </a:solidFill>
+                <a:latin typeface="Helvetica Neue"/>
+              </a:rPr>
+              <a:t>Open question for the instructor: the assignment specifies teams of 3 — we are 5. How should we proceed?</a:t>
+            </a:r>
+          </a:p>
+        </p:txBody>
+      </p:sp>
+      <p:sp>
+        <p:nvSpPr>
+          <p:cNvPr id="6" name="TextBox 5"/>
           <p:cNvSpPr txBox="1"/>
           <p:nvPr/>
         </p:nvSpPr>
@@ -6000,7 +5914,7 @@
 </p:sld>
 </file>
 
-<file path=ppt/slides/slide13.xml><?xml version="1.0" encoding="utf-8"?>
+<file path=ppt/slides/slide2.xml><?xml version="1.0" encoding="utf-8"?>
 <p:sld xmlns:a="http://schemas.openxmlformats.org/drawingml/2006/main" xmlns:p="http://schemas.openxmlformats.org/presentationml/2006/main" xmlns:r="http://schemas.openxmlformats.org/officeDocument/2006/relationships">
   <p:cSld>
     <p:bg>
@@ -6047,7 +5961,7 @@
                 </a:solidFill>
                 <a:latin typeface="Helvetica Neue"/>
               </a:rPr>
-              <a:t>WHO BUILDS IT</a:t>
+              <a:t>WHY</a:t>
             </a:r>
           </a:p>
           <a:p>
@@ -6058,7 +5972,7 @@
                 </a:solidFill>
                 <a:latin typeface="Noto Sans Khmer"/>
               </a:rPr>
-              <a:t>ក្រុមការងារ</a:t>
+              <a:t>បញ្ហា</a:t>
             </a:r>
           </a:p>
           <a:p>
@@ -6069,7 +5983,7 @@
                 </a:solidFill>
                 <a:latin typeface="Helvetica Neue"/>
               </a:rPr>
-              <a:t>Team + One Open Question</a:t>
+              <a:t>The Problem</a:t>
             </a:r>
           </a:p>
         </p:txBody>
@@ -6126,8 +6040,8 @@
         </p:nvSpPr>
         <p:spPr>
           <a:xfrm>
-            <a:off x="822960" y="2377440"/>
-            <a:ext cx="10515600" cy="2651760"/>
+            <a:off x="822960" y="2468880"/>
+            <a:ext cx="10515600" cy="3657600"/>
           </a:xfrm>
           <a:prstGeom prst="rect">
             <a:avLst/>
@@ -6142,186 +6056,133 @@
           <a:p>
             <a:pPr>
               <a:spcAft>
-                <a:spcPts val="1000"/>
+                <a:spcPts val="1400"/>
               </a:spcAft>
             </a:pPr>
             <a:r>
               <a:rPr sz="1900" b="1">
                 <a:solidFill>
+                  <a:srgbClr val="C0212E"/>
+                </a:solidFill>
+                <a:latin typeface="Helvetica Neue"/>
+              </a:rPr>
+              <a:t>▪  </a:t>
+            </a:r>
+            <a:r>
+              <a:rPr sz="1900" b="0">
+                <a:solidFill>
                   <a:srgbClr val="1A1A2E"/>
                 </a:solidFill>
                 <a:latin typeface="Helvetica Neue"/>
               </a:rPr>
-              <a:t>Nem Sothea   </a:t>
-            </a:r>
-            <a:r>
-              <a:rPr sz="1500" b="0">
-                <a:solidFill>
-                  <a:srgbClr val="5A5A6E"/>
-                </a:solidFill>
-                <a:latin typeface="Helvetica Neue"/>
-              </a:rPr>
-              <a:t>Tech Lead · Flutter · also PO, Security · Docker, CI, release</a:t>
+              <a:t>Hospitals and the National Blood Transfusion Center rely on Facebook posts</a:t>
             </a:r>
           </a:p>
           <a:p>
             <a:pPr>
               <a:spcAft>
-                <a:spcPts val="1000"/>
+                <a:spcPts val="1400"/>
               </a:spcAft>
             </a:pPr>
             <a:r>
               <a:rPr sz="1900" b="1">
                 <a:solidFill>
+                  <a:srgbClr val="C0212E"/>
+                </a:solidFill>
+                <a:latin typeface="Helvetica Neue"/>
+              </a:rPr>
+              <a:t>▪  </a:t>
+            </a:r>
+            <a:r>
+              <a:rPr sz="1900" b="0">
+                <a:solidFill>
                   <a:srgbClr val="1A1A2E"/>
                 </a:solidFill>
                 <a:latin typeface="Helvetica Neue"/>
               </a:rPr>
-              <a:t>Moeun Nithvaraman   </a:t>
-            </a:r>
-            <a:r>
-              <a:rPr sz="1500" b="0">
-                <a:solidFill>
-                  <a:srgbClr val="5A5A6E"/>
-                </a:solidFill>
-                <a:latin typeface="Helvetica Neue"/>
-              </a:rPr>
-              <a:t>Backend · PostgreSQL · Flyway · matching logic</a:t>
+              <a:t>A post reaches whoever scrolls past — not compatible donors nearby</a:t>
             </a:r>
           </a:p>
           <a:p>
             <a:pPr>
               <a:spcAft>
-                <a:spcPts val="1000"/>
+                <a:spcPts val="1400"/>
               </a:spcAft>
             </a:pPr>
             <a:r>
               <a:rPr sz="1900" b="1">
                 <a:solidFill>
+                  <a:srgbClr val="C0212E"/>
+                </a:solidFill>
+                <a:latin typeface="Helvetica Neue"/>
+              </a:rPr>
+              <a:t>▪  </a:t>
+            </a:r>
+            <a:r>
+              <a:rPr sz="1900" b="0">
+                <a:solidFill>
                   <a:srgbClr val="1A1A2E"/>
                 </a:solidFill>
                 <a:latin typeface="Helvetica Neue"/>
               </a:rPr>
-              <a:t>Suon Pisey   </a:t>
-            </a:r>
-            <a:r>
-              <a:rPr sz="1500" b="0">
-                <a:solidFill>
-                  <a:srgbClr val="5A5A6E"/>
-                </a:solidFill>
-                <a:latin typeface="Helvetica Neue"/>
-              </a:rPr>
-              <a:t>Frontend · Next.js portal · API client · i18n</a:t>
+              <a:t>No way to filter by blood type, distance, or donor eligibility</a:t>
             </a:r>
           </a:p>
           <a:p>
             <a:pPr>
               <a:spcAft>
-                <a:spcPts val="1000"/>
+                <a:spcPts val="1400"/>
               </a:spcAft>
             </a:pPr>
             <a:r>
               <a:rPr sz="1900" b="1">
                 <a:solidFill>
+                  <a:srgbClr val="C0212E"/>
+                </a:solidFill>
+                <a:latin typeface="Helvetica Neue"/>
+              </a:rPr>
+              <a:t>▪  </a:t>
+            </a:r>
+            <a:r>
+              <a:rPr sz="1900" b="0">
+                <a:solidFill>
                   <a:srgbClr val="1A1A2E"/>
                 </a:solidFill>
                 <a:latin typeface="Helvetica Neue"/>
               </a:rPr>
-              <a:t>Sourn SAVOURN   </a:t>
-            </a:r>
-            <a:r>
-              <a:rPr sz="1500" b="0">
-                <a:solidFill>
-                  <a:srgbClr val="5A5A6E"/>
-                </a:solidFill>
-                <a:latin typeface="Helvetica Neue"/>
-              </a:rPr>
-              <a:t>PO · PRD · briefs · wireframes · feature registry</a:t>
+              <a:t>No way to know if anyone is coming to help</a:t>
             </a:r>
           </a:p>
           <a:p>
             <a:pPr>
               <a:spcAft>
-                <a:spcPts val="1000"/>
+                <a:spcPts val="1400"/>
               </a:spcAft>
             </a:pPr>
             <a:r>
               <a:rPr sz="1900" b="1">
                 <a:solidFill>
+                  <a:srgbClr val="C0212E"/>
+                </a:solidFill>
+                <a:latin typeface="Helvetica Neue"/>
+              </a:rPr>
+              <a:t>▪  </a:t>
+            </a:r>
+            <a:r>
+              <a:rPr sz="1900" b="0">
+                <a:solidFill>
                   <a:srgbClr val="1A1A2E"/>
                 </a:solidFill>
                 <a:latin typeface="Helvetica Neue"/>
               </a:rPr>
-              <a:t>Oun Sreynich   </a:t>
-            </a:r>
-            <a:r>
-              <a:rPr sz="1500" b="0">
-                <a:solidFill>
-                  <a:srgbClr val="5A5A6E"/>
-                </a:solidFill>
-                <a:latin typeface="Helvetica Neue"/>
-              </a:rPr>
-              <a:t>QA · test plan · milestone acceptance · bug tracking</a:t>
-            </a:r>
-          </a:p>
-        </p:txBody>
-      </p:sp>
-      <p:sp>
-        <p:nvSpPr>
-          <p:cNvPr id="5" name="Rectangle 4"/>
-          <p:cNvSpPr/>
-          <p:nvPr/>
-        </p:nvSpPr>
-        <p:spPr>
-          <a:xfrm>
-            <a:off x="777240" y="5257800"/>
-            <a:ext cx="10607040" cy="777240"/>
-          </a:xfrm>
-          <a:prstGeom prst="rect">
-            <a:avLst/>
-          </a:prstGeom>
-          <a:solidFill>
-            <a:srgbClr val="0F6B5F"/>
-          </a:solidFill>
-          <a:ln>
-            <a:noFill/>
-          </a:ln>
-          <a:effectLst/>
-        </p:spPr>
-        <p:style>
-          <a:lnRef idx="1">
-            <a:schemeClr val="accent1"/>
-          </a:lnRef>
-          <a:fillRef idx="3">
-            <a:schemeClr val="accent1"/>
-          </a:fillRef>
-          <a:effectRef idx="2">
-            <a:schemeClr val="accent1"/>
-          </a:effectRef>
-          <a:fontRef idx="minor">
-            <a:schemeClr val="lt1"/>
-          </a:fontRef>
-        </p:style>
-        <p:txBody>
-          <a:bodyPr rtlCol="0" anchor="ctr" wrap="square"/>
-          <a:lstStyle/>
-          <a:p>
-            <a:pPr algn="ctr"/>
-            <a:r>
-              <a:rPr sz="1700" b="1">
-                <a:solidFill>
-                  <a:srgbClr val="FFFFFF"/>
-                </a:solidFill>
-                <a:latin typeface="Helvetica Neue"/>
-              </a:rPr>
-              <a:t>Open question for the instructor: the assignment specifies teams of 3 — we are 5. How should we proceed?</a:t>
-            </a:r>
-          </a:p>
-        </p:txBody>
-      </p:sp>
-      <p:sp>
-        <p:nvSpPr>
-          <p:cNvPr id="6" name="TextBox 5"/>
+              <a:t>Blood emergencies are measured in minutes; this process is not</a:t>
+            </a:r>
+          </a:p>
+        </p:txBody>
+      </p:sp>
+      <p:sp>
+        <p:nvSpPr>
+          <p:cNvPr id="5" name="TextBox 4"/>
           <p:cNvSpPr txBox="1"/>
           <p:nvPr/>
         </p:nvSpPr>
@@ -6361,7 +6222,7 @@
 </p:sld>
 </file>
 
-<file path=ppt/slides/slide2.xml><?xml version="1.0" encoding="utf-8"?>
+<file path=ppt/slides/slide3.xml><?xml version="1.0" encoding="utf-8"?>
 <p:sld xmlns:a="http://schemas.openxmlformats.org/drawingml/2006/main" xmlns:p="http://schemas.openxmlformats.org/presentationml/2006/main" xmlns:r="http://schemas.openxmlformats.org/officeDocument/2006/relationships">
   <p:cSld>
     <p:bg>
@@ -6408,7 +6269,7 @@
                 </a:solidFill>
                 <a:latin typeface="Helvetica Neue"/>
               </a:rPr>
-              <a:t>WHY</a:t>
+              <a:t>WHO</a:t>
             </a:r>
           </a:p>
           <a:p>
@@ -6419,7 +6280,7 @@
                 </a:solidFill>
                 <a:latin typeface="Noto Sans Khmer"/>
               </a:rPr>
-              <a:t>បញ្ហា</a:t>
+              <a:t>អ្នកប្រើប្រាស់គោលដៅ</a:t>
             </a:r>
           </a:p>
           <a:p>
@@ -6430,7 +6291,7 @@
                 </a:solidFill>
                 <a:latin typeface="Helvetica Neue"/>
               </a:rPr>
-              <a:t>The Problem</a:t>
+              <a:t>Target Users</a:t>
             </a:r>
           </a:p>
         </p:txBody>
@@ -6522,7 +6383,7 @@
                 </a:solidFill>
                 <a:latin typeface="Helvetica Neue"/>
               </a:rPr>
-              <a:t>Hospitals and the National Blood Transfusion Center rely on Facebook posts</a:t>
+              <a:t>Donor — a voluntary blood donor, on the mobile app</a:t>
             </a:r>
           </a:p>
           <a:p>
@@ -6547,7 +6408,7 @@
                 </a:solidFill>
                 <a:latin typeface="Helvetica Neue"/>
               </a:rPr>
-              <a:t>A post reaches whoever scrolls past — not compatible donors nearby</a:t>
+              <a:t>Requester — a patient or family member needing blood, mobile</a:t>
             </a:r>
           </a:p>
           <a:p>
@@ -6572,7 +6433,7 @@
                 </a:solidFill>
                 <a:latin typeface="Helvetica Neue"/>
               </a:rPr>
-              <a:t>No way to filter by blood type, distance, or donor eligibility</a:t>
+              <a:t>Hospital staff — verifies requests, confirms donations, on web</a:t>
             </a:r>
           </a:p>
           <a:p>
@@ -6597,7 +6458,7 @@
                 </a:solidFill>
                 <a:latin typeface="Helvetica Neue"/>
               </a:rPr>
-              <a:t>No way to know if anyone is coming to help</a:t>
+              <a:t>Administrator — manages users and hospitals, on web</a:t>
             </a:r>
           </a:p>
           <a:p>
@@ -6622,7 +6483,7 @@
                 </a:solidFill>
                 <a:latin typeface="Helvetica Neue"/>
               </a:rPr>
-              <a:t>Blood emergencies are measured in minutes; this process is not</a:t>
+              <a:t>Pilot scope: Phnom Penh first, other provinces later</a:t>
             </a:r>
           </a:p>
         </p:txBody>
@@ -6669,7 +6530,7 @@
 </p:sld>
 </file>
 
-<file path=ppt/slides/slide3.xml><?xml version="1.0" encoding="utf-8"?>
+<file path=ppt/slides/slide4.xml><?xml version="1.0" encoding="utf-8"?>
 <p:sld xmlns:a="http://schemas.openxmlformats.org/drawingml/2006/main" xmlns:p="http://schemas.openxmlformats.org/presentationml/2006/main" xmlns:r="http://schemas.openxmlformats.org/officeDocument/2006/relationships">
   <p:cSld>
     <p:bg>
@@ -6716,7 +6577,7 @@
                 </a:solidFill>
                 <a:latin typeface="Helvetica Neue"/>
               </a:rPr>
-              <a:t>WHO</a:t>
+              <a:t>WHAT</a:t>
             </a:r>
           </a:p>
           <a:p>
@@ -6727,7 +6588,7 @@
                 </a:solidFill>
                 <a:latin typeface="Noto Sans Khmer"/>
               </a:rPr>
-              <a:t>អ្នកប្រើប្រាស់គោលដៅ</a:t>
+              <a:t>មុខងារសំខាន់បី</a:t>
             </a:r>
           </a:p>
           <a:p>
@@ -6738,7 +6599,7 @@
                 </a:solidFill>
                 <a:latin typeface="Helvetica Neue"/>
               </a:rPr>
-              <a:t>Target Users</a:t>
+              <a:t>Three Core Features</a:t>
             </a:r>
           </a:p>
         </p:txBody>
@@ -6830,7 +6691,7 @@
                 </a:solidFill>
                 <a:latin typeface="Helvetica Neue"/>
               </a:rPr>
-              <a:t>Donor — a voluntary blood donor, on the mobile app</a:t>
+              <a:t>1 · Donor register — blood type, location, automatic 56-day eligibility check</a:t>
             </a:r>
           </a:p>
           <a:p>
@@ -6855,7 +6716,7 @@
                 </a:solidFill>
                 <a:latin typeface="Helvetica Neue"/>
               </a:rPr>
-              <a:t>Requester — a patient or family member needing blood, mobile</a:t>
+              <a:t>2 · Urgent request broadcast — push to matching donors by type and distance</a:t>
             </a:r>
           </a:p>
           <a:p>
@@ -6880,7 +6741,7 @@
                 </a:solidFill>
                 <a:latin typeface="Helvetica Neue"/>
               </a:rPr>
-              <a:t>Hospital staff — verifies requests, confirms donations, on web</a:t>
+              <a:t>3 · History + reminder — tracks cooldown, alerts donor when eligible again</a:t>
             </a:r>
           </a:p>
           <a:p>
@@ -6905,7 +6766,7 @@
                 </a:solidFill>
                 <a:latin typeface="Helvetica Neue"/>
               </a:rPr>
-              <a:t>Administrator — manages users and hospitals, on web</a:t>
+              <a:t>Matching uses ABO/Rh compatibility, not exact blood type only</a:t>
             </a:r>
           </a:p>
           <a:p>
@@ -6930,7 +6791,7 @@
                 </a:solidFill>
                 <a:latin typeface="Helvetica Neue"/>
               </a:rPr>
-              <a:t>Pilot scope: Phnom Penh first, other provinces later</a:t>
+              <a:t>Khmer and English on both clients, Khmer as the default</a:t>
             </a:r>
           </a:p>
         </p:txBody>
@@ -6977,7 +6838,7 @@
 </p:sld>
 </file>
 
-<file path=ppt/slides/slide4.xml><?xml version="1.0" encoding="utf-8"?>
+<file path=ppt/slides/slide5.xml><?xml version="1.0" encoding="utf-8"?>
 <p:sld xmlns:a="http://schemas.openxmlformats.org/drawingml/2006/main" xmlns:p="http://schemas.openxmlformats.org/presentationml/2006/main" xmlns:r="http://schemas.openxmlformats.org/officeDocument/2006/relationships">
   <p:cSld>
     <p:bg>
@@ -7024,7 +6885,7 @@
                 </a:solidFill>
                 <a:latin typeface="Helvetica Neue"/>
               </a:rPr>
-              <a:t>WHAT</a:t>
+              <a:t>WHY</a:t>
             </a:r>
           </a:p>
           <a:p>
@@ -7035,7 +6896,7 @@
                 </a:solidFill>
                 <a:latin typeface="Noto Sans Khmer"/>
               </a:rPr>
-              <a:t>មុខងារសំខាន់បី</a:t>
+              <a:t>ហេតុអ្វីត្រូវជាកម្មវិធីទូរស័ព្ទ</a:t>
             </a:r>
           </a:p>
           <a:p>
@@ -7046,7 +6907,7 @@
                 </a:solidFill>
                 <a:latin typeface="Helvetica Neue"/>
               </a:rPr>
-              <a:t>Three Core Features</a:t>
+              <a:t>Why Mobile, Not a Website</a:t>
             </a:r>
           </a:p>
         </p:txBody>
@@ -7103,8 +6964,8 @@
         </p:nvSpPr>
         <p:spPr>
           <a:xfrm>
-            <a:off x="822960" y="2468880"/>
-            <a:ext cx="10515600" cy="3657600"/>
+            <a:off x="822960" y="2560320"/>
+            <a:ext cx="10515600" cy="1828800"/>
           </a:xfrm>
           <a:prstGeom prst="rect">
             <a:avLst/>
@@ -7117,135 +6978,119 @@
           </a:bodyPr>
           <a:lstStyle/>
           <a:p>
+            <a:r>
+              <a:rPr sz="2700" b="1">
+                <a:solidFill>
+                  <a:srgbClr val="1A1A2E"/>
+                </a:solidFill>
+                <a:latin typeface="Helvetica Neue"/>
+              </a:rPr>
+              <a:t>A blood emergency needs an instant, location-aware push alert on a donor's phone — a website can neither push a time-critical notification nor read real-time GPS.</a:t>
+            </a:r>
+          </a:p>
+        </p:txBody>
+      </p:sp>
+      <p:sp>
+        <p:nvSpPr>
+          <p:cNvPr id="5" name="TextBox 4"/>
+          <p:cNvSpPr txBox="1"/>
+          <p:nvPr/>
+        </p:nvSpPr>
+        <p:spPr>
+          <a:xfrm>
+            <a:off x="822960" y="4572000"/>
+            <a:ext cx="10515600" cy="1463040"/>
+          </a:xfrm>
+          <a:prstGeom prst="rect">
+            <a:avLst/>
+          </a:prstGeom>
+          <a:noFill/>
+        </p:spPr>
+        <p:txBody>
+          <a:bodyPr wrap="square">
+            <a:spAutoFit/>
+          </a:bodyPr>
+          <a:lstStyle/>
+          <a:p>
             <a:pPr>
               <a:spcAft>
-                <a:spcPts val="1400"/>
+                <a:spcPts val="800"/>
               </a:spcAft>
             </a:pPr>
             <a:r>
-              <a:rPr sz="1900" b="1">
-                <a:solidFill>
-                  <a:srgbClr val="C0212E"/>
+              <a:rPr sz="1500" b="1">
+                <a:solidFill>
+                  <a:srgbClr val="0F6B5F"/>
                 </a:solidFill>
                 <a:latin typeface="Helvetica Neue"/>
               </a:rPr>
               <a:t>▪  </a:t>
             </a:r>
             <a:r>
-              <a:rPr sz="1900" b="0">
-                <a:solidFill>
-                  <a:srgbClr val="1A1A2E"/>
-                </a:solidFill>
-                <a:latin typeface="Helvetica Neue"/>
-              </a:rPr>
-              <a:t>1 · Donor register — blood type, location, automatic 56-day eligibility check</a:t>
+              <a:rPr sz="1500" b="0">
+                <a:solidFill>
+                  <a:srgbClr val="5A5A6E"/>
+                </a:solidFill>
+                <a:latin typeface="Helvetica Neue"/>
+              </a:rPr>
+              <a:t>Push notification — reaches a donor who is not looking at their phone</a:t>
             </a:r>
           </a:p>
           <a:p>
             <a:pPr>
               <a:spcAft>
-                <a:spcPts val="1400"/>
+                <a:spcPts val="800"/>
               </a:spcAft>
             </a:pPr>
             <a:r>
-              <a:rPr sz="1900" b="1">
-                <a:solidFill>
-                  <a:srgbClr val="C0212E"/>
+              <a:rPr sz="1500" b="1">
+                <a:solidFill>
+                  <a:srgbClr val="0F6B5F"/>
                 </a:solidFill>
                 <a:latin typeface="Helvetica Neue"/>
               </a:rPr>
               <a:t>▪  </a:t>
             </a:r>
             <a:r>
-              <a:rPr sz="1900" b="0">
-                <a:solidFill>
-                  <a:srgbClr val="1A1A2E"/>
-                </a:solidFill>
-                <a:latin typeface="Helvetica Neue"/>
-              </a:rPr>
-              <a:t>2 · Urgent request broadcast — push to matching donors by type and distance</a:t>
+              <a:rPr sz="1500" b="0">
+                <a:solidFill>
+                  <a:srgbClr val="5A5A6E"/>
+                </a:solidFill>
+                <a:latin typeface="Helvetica Neue"/>
+              </a:rPr>
+              <a:t>Real-time GPS — ranks donors by actual distance to the hospital</a:t>
             </a:r>
           </a:p>
           <a:p>
             <a:pPr>
               <a:spcAft>
-                <a:spcPts val="1400"/>
+                <a:spcPts val="800"/>
               </a:spcAft>
             </a:pPr>
             <a:r>
-              <a:rPr sz="1900" b="1">
-                <a:solidFill>
-                  <a:srgbClr val="C0212E"/>
+              <a:rPr sz="1500" b="1">
+                <a:solidFill>
+                  <a:srgbClr val="0F6B5F"/>
                 </a:solidFill>
                 <a:latin typeface="Helvetica Neue"/>
               </a:rPr>
               <a:t>▪  </a:t>
             </a:r>
             <a:r>
-              <a:rPr sz="1900" b="0">
-                <a:solidFill>
-                  <a:srgbClr val="1A1A2E"/>
-                </a:solidFill>
-                <a:latin typeface="Helvetica Neue"/>
-              </a:rPr>
-              <a:t>3 · History + reminder — tracks cooldown, alerts donor when eligible again</a:t>
-            </a:r>
-          </a:p>
-          <a:p>
-            <a:pPr>
-              <a:spcAft>
-                <a:spcPts val="1400"/>
-              </a:spcAft>
-            </a:pPr>
-            <a:r>
-              <a:rPr sz="1900" b="1">
-                <a:solidFill>
-                  <a:srgbClr val="C0212E"/>
-                </a:solidFill>
-                <a:latin typeface="Helvetica Neue"/>
-              </a:rPr>
-              <a:t>▪  </a:t>
-            </a:r>
-            <a:r>
-              <a:rPr sz="1900" b="0">
-                <a:solidFill>
-                  <a:srgbClr val="1A1A2E"/>
-                </a:solidFill>
-                <a:latin typeface="Helvetica Neue"/>
-              </a:rPr>
-              <a:t>Matching uses ABO/Rh compatibility, not exact blood type only</a:t>
-            </a:r>
-          </a:p>
-          <a:p>
-            <a:pPr>
-              <a:spcAft>
-                <a:spcPts val="1400"/>
-              </a:spcAft>
-            </a:pPr>
-            <a:r>
-              <a:rPr sz="1900" b="1">
-                <a:solidFill>
-                  <a:srgbClr val="C0212E"/>
-                </a:solidFill>
-                <a:latin typeface="Helvetica Neue"/>
-              </a:rPr>
-              <a:t>▪  </a:t>
-            </a:r>
-            <a:r>
-              <a:rPr sz="1900" b="0">
-                <a:solidFill>
-                  <a:srgbClr val="1A1A2E"/>
-                </a:solidFill>
-                <a:latin typeface="Helvetica Neue"/>
-              </a:rPr>
-              <a:t>Khmer and English on both clients, Khmer as the default</a:t>
-            </a:r>
-          </a:p>
-        </p:txBody>
-      </p:sp>
-      <p:sp>
-        <p:nvSpPr>
-          <p:cNvPr id="5" name="TextBox 4"/>
+              <a:rPr sz="1500" b="0">
+                <a:solidFill>
+                  <a:srgbClr val="5A5A6E"/>
+                </a:solidFill>
+                <a:latin typeface="Helvetica Neue"/>
+              </a:rPr>
+              <a:t>Installed app — no URL to find while a relative is in a corridor</a:t>
+            </a:r>
+          </a:p>
+        </p:txBody>
+      </p:sp>
+      <p:sp>
+        <p:nvSpPr>
+          <p:cNvPr id="6" name="TextBox 5"/>
           <p:cNvSpPr txBox="1"/>
           <p:nvPr/>
         </p:nvSpPr>
@@ -7285,7 +7130,7 @@
 </p:sld>
 </file>
 
-<file path=ppt/slides/slide5.xml><?xml version="1.0" encoding="utf-8"?>
+<file path=ppt/slides/slide6.xml><?xml version="1.0" encoding="utf-8"?>
 <p:sld xmlns:a="http://schemas.openxmlformats.org/drawingml/2006/main" xmlns:p="http://schemas.openxmlformats.org/presentationml/2006/main" xmlns:r="http://schemas.openxmlformats.org/officeDocument/2006/relationships">
   <p:cSld>
     <p:bg>
@@ -7332,7 +7177,7 @@
                 </a:solidFill>
                 <a:latin typeface="Helvetica Neue"/>
               </a:rPr>
-              <a:t>WHY</a:t>
+              <a:t>HOW</a:t>
             </a:r>
           </a:p>
           <a:p>
@@ -7343,7 +7188,7 @@
                 </a:solidFill>
                 <a:latin typeface="Noto Sans Khmer"/>
               </a:rPr>
-              <a:t>ហេតុអ្វីត្រូវជាកម្មវិធីទូរស័ព្ទ</a:t>
+              <a:t>ស្ថាបត្យកម្មប្រព័ន្ធ</a:t>
             </a:r>
           </a:p>
           <a:p>
@@ -7354,7 +7199,7 @@
                 </a:solidFill>
                 <a:latin typeface="Helvetica Neue"/>
               </a:rPr>
-              <a:t>Why Mobile, Not a Website</a:t>
+              <a:t>Architecture</a:t>
             </a:r>
           </a:p>
         </p:txBody>
@@ -7411,8 +7256,8 @@
         </p:nvSpPr>
         <p:spPr>
           <a:xfrm>
-            <a:off x="822960" y="2560320"/>
-            <a:ext cx="10515600" cy="1828800"/>
+            <a:off x="822960" y="2423160"/>
+            <a:ext cx="6035040" cy="2743200"/>
           </a:xfrm>
           <a:prstGeom prst="rect">
             <a:avLst/>
@@ -7426,13 +7271,19 @@
           <a:lstStyle/>
           <a:p>
             <a:r>
-              <a:rPr sz="2700" b="1">
+              <a:rPr sz="1300">
                 <a:solidFill>
                   <a:srgbClr val="1A1A2E"/>
                 </a:solidFill>
-                <a:latin typeface="Helvetica Neue"/>
-              </a:rPr>
-              <a:t>A blood emergency needs an instant, location-aware push alert on a donor's phone — a website can neither push a time-critical notification nor read real-time GPS.</a:t>
+                <a:latin typeface="Menlo"/>
+              </a:rPr>
+              <a:t>                Spring Boot API  ──▶  PostgreSQL (Flyway)
+                    ▲          ▲
+       REST/HTTPS   │          │   REST/HTTPS
+                    │          │
+       Flutter app ─┘          └─ Next.js web portal
+    (donors / patients)          (hospitals / admin)
+         → Play Store</a:t>
             </a:r>
           </a:p>
         </p:txBody>
@@ -7445,8 +7296,8 @@
         </p:nvSpPr>
         <p:spPr>
           <a:xfrm>
-            <a:off x="822960" y="4572000"/>
-            <a:ext cx="10515600" cy="1463040"/>
+            <a:off x="7132320" y="2423160"/>
+            <a:ext cx="4297680" cy="3291840"/>
           </a:xfrm>
           <a:prstGeom prst="rect">
             <a:avLst/>
@@ -7461,7 +7312,7 @@
           <a:p>
             <a:pPr>
               <a:spcAft>
-                <a:spcPts val="800"/>
+                <a:spcPts val="1100"/>
               </a:spcAft>
             </a:pPr>
             <a:r>
@@ -7471,22 +7322,22 @@
                 </a:solidFill>
                 <a:latin typeface="Helvetica Neue"/>
               </a:rPr>
-              <a:t>▪  </a:t>
+              <a:t>Backend   </a:t>
             </a:r>
             <a:r>
               <a:rPr sz="1500" b="0">
                 <a:solidFill>
-                  <a:srgbClr val="5A5A6E"/>
-                </a:solidFill>
-                <a:latin typeface="Helvetica Neue"/>
-              </a:rPr>
-              <a:t>Push notification — reaches a donor who is not looking at their phone</a:t>
+                  <a:srgbClr val="1A1A2E"/>
+                </a:solidFill>
+                <a:latin typeface="Helvetica Neue"/>
+              </a:rPr>
+              <a:t>Spring Boot · PostgreSQL · Flyway</a:t>
             </a:r>
           </a:p>
           <a:p>
             <a:pPr>
               <a:spcAft>
-                <a:spcPts val="800"/>
+                <a:spcPts val="1100"/>
               </a:spcAft>
             </a:pPr>
             <a:r>
@@ -7496,22 +7347,22 @@
                 </a:solidFill>
                 <a:latin typeface="Helvetica Neue"/>
               </a:rPr>
-              <a:t>▪  </a:t>
+              <a:t>Web   </a:t>
             </a:r>
             <a:r>
               <a:rPr sz="1500" b="0">
                 <a:solidFill>
-                  <a:srgbClr val="5A5A6E"/>
-                </a:solidFill>
-                <a:latin typeface="Helvetica Neue"/>
-              </a:rPr>
-              <a:t>Real-time GPS — ranks donors by actual distance to the hospital</a:t>
+                  <a:srgbClr val="1A1A2E"/>
+                </a:solidFill>
+                <a:latin typeface="Helvetica Neue"/>
+              </a:rPr>
+              <a:t>Next.js · TypeScript · Tailwind</a:t>
             </a:r>
           </a:p>
           <a:p>
             <a:pPr>
               <a:spcAft>
-                <a:spcPts val="800"/>
+                <a:spcPts val="1100"/>
               </a:spcAft>
             </a:pPr>
             <a:r>
@@ -7521,16 +7372,91 @@
                 </a:solidFill>
                 <a:latin typeface="Helvetica Neue"/>
               </a:rPr>
-              <a:t>▪  </a:t>
+              <a:t>Mobile   </a:t>
             </a:r>
             <a:r>
               <a:rPr sz="1500" b="0">
                 <a:solidFill>
-                  <a:srgbClr val="5A5A6E"/>
-                </a:solidFill>
-                <a:latin typeface="Helvetica Neue"/>
-              </a:rPr>
-              <a:t>Installed app — no URL to find while a relative is in a corridor</a:t>
+                  <a:srgbClr val="1A1A2E"/>
+                </a:solidFill>
+                <a:latin typeface="Helvetica Neue"/>
+              </a:rPr>
+              <a:t>Flutter → native Android</a:t>
+            </a:r>
+          </a:p>
+          <a:p>
+            <a:pPr>
+              <a:spcAft>
+                <a:spcPts val="1100"/>
+              </a:spcAft>
+            </a:pPr>
+            <a:r>
+              <a:rPr sz="1500" b="1">
+                <a:solidFill>
+                  <a:srgbClr val="0F6B5F"/>
+                </a:solidFill>
+                <a:latin typeface="Helvetica Neue"/>
+              </a:rPr>
+              <a:t>Push   </a:t>
+            </a:r>
+            <a:r>
+              <a:rPr sz="1500" b="0">
+                <a:solidFill>
+                  <a:srgbClr val="1A1A2E"/>
+                </a:solidFill>
+                <a:latin typeface="Helvetica Neue"/>
+              </a:rPr>
+              <a:t>Firebase Cloud Messaging</a:t>
+            </a:r>
+          </a:p>
+          <a:p>
+            <a:pPr>
+              <a:spcAft>
+                <a:spcPts val="1100"/>
+              </a:spcAft>
+            </a:pPr>
+            <a:r>
+              <a:rPr sz="1500" b="1">
+                <a:solidFill>
+                  <a:srgbClr val="0F6B5F"/>
+                </a:solidFill>
+                <a:latin typeface="Helvetica Neue"/>
+              </a:rPr>
+              <a:t>Location   </a:t>
+            </a:r>
+            <a:r>
+              <a:rPr sz="1500" b="0">
+                <a:solidFill>
+                  <a:srgbClr val="1A1A2E"/>
+                </a:solidFill>
+                <a:latin typeface="Helvetica Neue"/>
+              </a:rPr>
+              <a:t>Google Maps · geolocator</a:t>
+            </a:r>
+          </a:p>
+          <a:p>
+            <a:pPr>
+              <a:spcAft>
+                <a:spcPts val="1100"/>
+              </a:spcAft>
+            </a:pPr>
+            <a:r>
+              <a:rPr sz="1500" b="1">
+                <a:solidFill>
+                  <a:srgbClr val="0F6B5F"/>
+                </a:solidFill>
+                <a:latin typeface="Helvetica Neue"/>
+              </a:rPr>
+              <a:t>Local dev + CI   </a:t>
+            </a:r>
+            <a:r>
+              <a:rPr sz="1500" b="0">
+                <a:solidFill>
+                  <a:srgbClr val="1A1A2E"/>
+                </a:solidFill>
+                <a:latin typeface="Helvetica Neue"/>
+              </a:rPr>
+              <a:t>Docker Compose · GitHub Actions</a:t>
             </a:r>
           </a:p>
         </p:txBody>
@@ -7577,7 +7503,7 @@
 </p:sld>
 </file>
 
-<file path=ppt/slides/slide6.xml><?xml version="1.0" encoding="utf-8"?>
+<file path=ppt/slides/slide7.xml><?xml version="1.0" encoding="utf-8"?>
 <p:sld xmlns:a="http://schemas.openxmlformats.org/drawingml/2006/main" xmlns:p="http://schemas.openxmlformats.org/presentationml/2006/main" xmlns:r="http://schemas.openxmlformats.org/officeDocument/2006/relationships">
   <p:cSld>
     <p:bg>
@@ -7635,7 +7561,7 @@
                 </a:solidFill>
                 <a:latin typeface="Noto Sans Khmer"/>
               </a:rPr>
-              <a:t>ស្ថាបត្យកម្មប្រព័ន្ធ</a:t>
+              <a:t>ការគ្រប់គ្រងវិសាលភាព</a:t>
             </a:r>
           </a:p>
           <a:p>
@@ -7646,7 +7572,7 @@
                 </a:solidFill>
                 <a:latin typeface="Helvetica Neue"/>
               </a:rPr>
-              <a:t>Architecture</a:t>
+              <a:t>How We Manage Scope</a:t>
             </a:r>
           </a:p>
         </p:txBody>
@@ -7703,8 +7629,8 @@
         </p:nvSpPr>
         <p:spPr>
           <a:xfrm>
-            <a:off x="822960" y="2423160"/>
-            <a:ext cx="6035040" cy="2743200"/>
+            <a:off x="822960" y="2468880"/>
+            <a:ext cx="10515600" cy="3657600"/>
           </a:xfrm>
           <a:prstGeom prst="rect">
             <a:avLst/>
@@ -7717,200 +7643,135 @@
           </a:bodyPr>
           <a:lstStyle/>
           <a:p>
-            <a:r>
-              <a:rPr sz="1300">
-                <a:solidFill>
-                  <a:srgbClr val="1A1A2E"/>
-                </a:solidFill>
-                <a:latin typeface="Menlo"/>
-              </a:rPr>
-              <a:t>                Spring Boot API  ──▶  PostgreSQL (Flyway)
-                    ▲          ▲
-       REST/HTTPS   │          │   REST/HTTPS
-                    │          │
-       Flutter app ─┘          └─ Next.js web portal
-    (donors / patients)          (hospitals / admin)
-         → Play Store</a:t>
-            </a:r>
-          </a:p>
-        </p:txBody>
-      </p:sp>
-      <p:sp>
-        <p:nvSpPr>
-          <p:cNvPr id="5" name="TextBox 4"/>
-          <p:cNvSpPr txBox="1"/>
-          <p:nvPr/>
-        </p:nvSpPr>
-        <p:spPr>
-          <a:xfrm>
-            <a:off x="7132320" y="2423160"/>
-            <a:ext cx="4297680" cy="3291840"/>
-          </a:xfrm>
-          <a:prstGeom prst="rect">
-            <a:avLst/>
-          </a:prstGeom>
-          <a:noFill/>
-        </p:spPr>
-        <p:txBody>
-          <a:bodyPr wrap="square">
-            <a:spAutoFit/>
-          </a:bodyPr>
-          <a:lstStyle/>
-          <a:p>
             <a:pPr>
               <a:spcAft>
-                <a:spcPts val="1100"/>
+                <a:spcPts val="1400"/>
               </a:spcAft>
             </a:pPr>
             <a:r>
-              <a:rPr sz="1500" b="1">
-                <a:solidFill>
-                  <a:srgbClr val="0F6B5F"/>
-                </a:solidFill>
-                <a:latin typeface="Helvetica Neue"/>
-              </a:rPr>
-              <a:t>Backend   </a:t>
-            </a:r>
-            <a:r>
-              <a:rPr sz="1500" b="0">
+              <a:rPr sz="1900" b="1">
+                <a:solidFill>
+                  <a:srgbClr val="C0212E"/>
+                </a:solidFill>
+                <a:latin typeface="Helvetica Neue"/>
+              </a:rPr>
+              <a:t>▪  </a:t>
+            </a:r>
+            <a:r>
+              <a:rPr sz="1900" b="0">
                 <a:solidFill>
                   <a:srgbClr val="1A1A2E"/>
                 </a:solidFill>
                 <a:latin typeface="Helvetica Neue"/>
               </a:rPr>
-              <a:t>Spring Boot · PostgreSQL · Flyway</a:t>
+              <a:t>19 features registered — 8 in the build, 8 deliberately deferred</a:t>
             </a:r>
           </a:p>
           <a:p>
             <a:pPr>
               <a:spcAft>
-                <a:spcPts val="1100"/>
+                <a:spcPts val="1400"/>
               </a:spcAft>
             </a:pPr>
             <a:r>
-              <a:rPr sz="1500" b="1">
-                <a:solidFill>
-                  <a:srgbClr val="0F6B5F"/>
-                </a:solidFill>
-                <a:latin typeface="Helvetica Neue"/>
-              </a:rPr>
-              <a:t>Web   </a:t>
-            </a:r>
-            <a:r>
-              <a:rPr sz="1500" b="0">
+              <a:rPr sz="1900" b="1">
+                <a:solidFill>
+                  <a:srgbClr val="C0212E"/>
+                </a:solidFill>
+                <a:latin typeface="Helvetica Neue"/>
+              </a:rPr>
+              <a:t>▪  </a:t>
+            </a:r>
+            <a:r>
+              <a:rPr sz="1900" b="0">
                 <a:solidFill>
                   <a:srgbClr val="1A1A2E"/>
                 </a:solidFill>
                 <a:latin typeface="Helvetica Neue"/>
               </a:rPr>
-              <a:t>Next.js · TypeScript · Tailwind</a:t>
+              <a:t>Cut against what the course grades, not what interests us</a:t>
             </a:r>
           </a:p>
           <a:p>
             <a:pPr>
               <a:spcAft>
-                <a:spcPts val="1100"/>
+                <a:spcPts val="1400"/>
               </a:spcAft>
             </a:pPr>
             <a:r>
-              <a:rPr sz="1500" b="1">
-                <a:solidFill>
-                  <a:srgbClr val="0F6B5F"/>
-                </a:solidFill>
-                <a:latin typeface="Helvetica Neue"/>
-              </a:rPr>
-              <a:t>Mobile   </a:t>
-            </a:r>
-            <a:r>
-              <a:rPr sz="1500" b="0">
+              <a:rPr sz="1900" b="1">
+                <a:solidFill>
+                  <a:srgbClr val="C0212E"/>
+                </a:solidFill>
+                <a:latin typeface="Helvetica Neue"/>
+              </a:rPr>
+              <a:t>▪  </a:t>
+            </a:r>
+            <a:r>
+              <a:rPr sz="1900" b="0">
                 <a:solidFill>
                   <a:srgbClr val="1A1A2E"/>
                 </a:solidFill>
                 <a:latin typeface="Helvetica Neue"/>
               </a:rPr>
-              <a:t>Flutter → native Android</a:t>
+              <a:t>Definition of Done: spec signed off, merged, QA verified, no open bugs</a:t>
             </a:r>
           </a:p>
           <a:p>
             <a:pPr>
               <a:spcAft>
-                <a:spcPts val="1100"/>
+                <a:spcPts val="1400"/>
               </a:spcAft>
             </a:pPr>
             <a:r>
-              <a:rPr sz="1500" b="1">
-                <a:solidFill>
-                  <a:srgbClr val="0F6B5F"/>
-                </a:solidFill>
-                <a:latin typeface="Helvetica Neue"/>
-              </a:rPr>
-              <a:t>Push   </a:t>
-            </a:r>
-            <a:r>
-              <a:rPr sz="1500" b="0">
+              <a:rPr sz="1900" b="1">
+                <a:solidFill>
+                  <a:srgbClr val="C0212E"/>
+                </a:solidFill>
+                <a:latin typeface="Helvetica Neue"/>
+              </a:rPr>
+              <a:t>▪  </a:t>
+            </a:r>
+            <a:r>
+              <a:rPr sz="1900" b="0">
                 <a:solidFill>
                   <a:srgbClr val="1A1A2E"/>
                 </a:solidFill>
                 <a:latin typeface="Helvetica Neue"/>
               </a:rPr>
-              <a:t>Firebase Cloud Messaging</a:t>
+              <a:t>Every architecture choice recorded as a decision record</a:t>
             </a:r>
           </a:p>
           <a:p>
             <a:pPr>
               <a:spcAft>
-                <a:spcPts val="1100"/>
+                <a:spcPts val="1400"/>
               </a:spcAft>
             </a:pPr>
             <a:r>
-              <a:rPr sz="1500" b="1">
-                <a:solidFill>
-                  <a:srgbClr val="0F6B5F"/>
-                </a:solidFill>
-                <a:latin typeface="Helvetica Neue"/>
-              </a:rPr>
-              <a:t>Location   </a:t>
-            </a:r>
-            <a:r>
-              <a:rPr sz="1500" b="0">
+              <a:rPr sz="1900" b="1">
+                <a:solidFill>
+                  <a:srgbClr val="C0212E"/>
+                </a:solidFill>
+                <a:latin typeface="Helvetica Neue"/>
+              </a:rPr>
+              <a:t>▪  </a:t>
+            </a:r>
+            <a:r>
+              <a:rPr sz="1900" b="0">
                 <a:solidFill>
                   <a:srgbClr val="1A1A2E"/>
                 </a:solidFill>
                 <a:latin typeface="Helvetica Neue"/>
               </a:rPr>
-              <a:t>Google Maps · geolocator</a:t>
-            </a:r>
-          </a:p>
-          <a:p>
-            <a:pPr>
-              <a:spcAft>
-                <a:spcPts val="1100"/>
-              </a:spcAft>
-            </a:pPr>
-            <a:r>
-              <a:rPr sz="1500" b="1">
-                <a:solidFill>
-                  <a:srgbClr val="0F6B5F"/>
-                </a:solidFill>
-                <a:latin typeface="Helvetica Neue"/>
-              </a:rPr>
-              <a:t>Local dev + CI   </a:t>
-            </a:r>
-            <a:r>
-              <a:rPr sz="1500" b="0">
-                <a:solidFill>
-                  <a:srgbClr val="1A1A2E"/>
-                </a:solidFill>
-                <a:latin typeface="Helvetica Neue"/>
-              </a:rPr>
-              <a:t>Docker Compose · GitHub Actions</a:t>
-            </a:r>
-          </a:p>
-        </p:txBody>
-      </p:sp>
-      <p:sp>
-        <p:nvSpPr>
-          <p:cNvPr id="6" name="TextBox 5"/>
+              <a:t>Deferred features keep their documents — that is our future work</a:t>
+            </a:r>
+          </a:p>
+        </p:txBody>
+      </p:sp>
+      <p:sp>
+        <p:nvSpPr>
+          <p:cNvPr id="5" name="TextBox 4"/>
           <p:cNvSpPr txBox="1"/>
           <p:nvPr/>
         </p:nvSpPr>
@@ -7950,7 +7811,7 @@
 </p:sld>
 </file>
 
-<file path=ppt/slides/slide7.xml><?xml version="1.0" encoding="utf-8"?>
+<file path=ppt/slides/slide8.xml><?xml version="1.0" encoding="utf-8"?>
 <p:sld xmlns:a="http://schemas.openxmlformats.org/drawingml/2006/main" xmlns:p="http://schemas.openxmlformats.org/presentationml/2006/main" xmlns:r="http://schemas.openxmlformats.org/officeDocument/2006/relationships">
   <p:cSld>
     <p:bg>
@@ -7997,7 +7858,7 @@
                 </a:solidFill>
                 <a:latin typeface="Helvetica Neue"/>
               </a:rPr>
-              <a:t>HOW</a:t>
+              <a:t>WHEN</a:t>
             </a:r>
           </a:p>
           <a:p>
@@ -8008,7 +7869,7 @@
                 </a:solidFill>
                 <a:latin typeface="Noto Sans Khmer"/>
               </a:rPr>
-              <a:t>ការគ្រប់គ្រងវិសាលភាព</a:t>
+              <a:t>ដំណាក់កាលការងារ</a:t>
             </a:r>
           </a:p>
           <a:p>
@@ -8019,7 +7880,7 @@
                 </a:solidFill>
                 <a:latin typeface="Helvetica Neue"/>
               </a:rPr>
-              <a:t>How We Manage Scope</a:t>
+              <a:t>Milestones · M1 → M7</a:t>
             </a:r>
           </a:p>
         </p:txBody>
@@ -8076,8 +7937,8 @@
         </p:nvSpPr>
         <p:spPr>
           <a:xfrm>
-            <a:off x="822960" y="2468880"/>
-            <a:ext cx="10515600" cy="3657600"/>
+            <a:off x="822960" y="2331720"/>
+            <a:ext cx="10607040" cy="3749039"/>
           </a:xfrm>
           <a:prstGeom prst="rect">
             <a:avLst/>
@@ -8092,126 +7953,239 @@
           <a:p>
             <a:pPr>
               <a:spcAft>
-                <a:spcPts val="1400"/>
+                <a:spcPts val="900"/>
               </a:spcAft>
             </a:pPr>
             <a:r>
-              <a:rPr sz="1900" b="1">
-                <a:solidFill>
-                  <a:srgbClr val="C0212E"/>
-                </a:solidFill>
-                <a:latin typeface="Helvetica Neue"/>
-              </a:rPr>
-              <a:t>▪  </a:t>
-            </a:r>
-            <a:r>
-              <a:rPr sz="1900" b="0">
+              <a:rPr sz="1700" b="1">
+                <a:solidFill>
+                  <a:srgbClr val="0F6B5F"/>
+                </a:solidFill>
+                <a:latin typeface="Helvetica Neue"/>
+              </a:rPr>
+              <a:t>M1  </a:t>
+            </a:r>
+            <a:r>
+              <a:rPr sz="1500" b="0">
+                <a:solidFill>
+                  <a:srgbClr val="5A5A6E"/>
+                </a:solidFill>
+                <a:latin typeface="Helvetica Neue"/>
+              </a:rPr>
+              <a:t>W3-4      </a:t>
+            </a:r>
+            <a:r>
+              <a:rPr sz="1500" b="0">
                 <a:solidFill>
                   <a:srgbClr val="1A1A2E"/>
                 </a:solidFill>
                 <a:latin typeface="Helvetica Neue"/>
               </a:rPr>
-              <a:t>19 features registered — 8 in the build, 8 deliberately deferred</a:t>
+              <a:t>ERD (done), wireframes for the 4 core screens only, API spec for the 8 core FRs</a:t>
             </a:r>
           </a:p>
           <a:p>
             <a:pPr>
               <a:spcAft>
-                <a:spcPts val="1400"/>
+                <a:spcPts val="900"/>
               </a:spcAft>
             </a:pPr>
             <a:r>
-              <a:rPr sz="1900" b="1">
-                <a:solidFill>
-                  <a:srgbClr val="C0212E"/>
-                </a:solidFill>
-                <a:latin typeface="Helvetica Neue"/>
-              </a:rPr>
-              <a:t>▪  </a:t>
-            </a:r>
-            <a:r>
-              <a:rPr sz="1900" b="0">
+              <a:rPr sz="1700" b="1">
+                <a:solidFill>
+                  <a:srgbClr val="0F6B5F"/>
+                </a:solidFill>
+                <a:latin typeface="Helvetica Neue"/>
+              </a:rPr>
+              <a:t>M2  </a:t>
+            </a:r>
+            <a:r>
+              <a:rPr sz="1500" b="0">
+                <a:solidFill>
+                  <a:srgbClr val="5A5A6E"/>
+                </a:solidFill>
+                <a:latin typeface="Helvetica Neue"/>
+              </a:rPr>
+              <a:t>W5-6      </a:t>
+            </a:r>
+            <a:r>
+              <a:rPr sz="1500" b="0">
                 <a:solidFill>
                   <a:srgbClr val="1A1A2E"/>
                 </a:solidFill>
                 <a:latin typeface="Helvetica Neue"/>
               </a:rPr>
-              <a:t>Cut against what the course grades, not what interests us</a:t>
+              <a:t>Spring Boot init (PostgreSQL, Flyway), Flutter + Next.js init, docker-compose up runs backend…</a:t>
             </a:r>
           </a:p>
           <a:p>
             <a:pPr>
               <a:spcAft>
-                <a:spcPts val="1400"/>
+                <a:spcPts val="900"/>
               </a:spcAft>
             </a:pPr>
             <a:r>
-              <a:rPr sz="1900" b="1">
-                <a:solidFill>
-                  <a:srgbClr val="C0212E"/>
-                </a:solidFill>
-                <a:latin typeface="Helvetica Neue"/>
-              </a:rPr>
-              <a:t>▪  </a:t>
-            </a:r>
-            <a:r>
-              <a:rPr sz="1900" b="0">
+              <a:rPr sz="1700" b="1">
+                <a:solidFill>
+                  <a:srgbClr val="0F6B5F"/>
+                </a:solidFill>
+                <a:latin typeface="Helvetica Neue"/>
+              </a:rPr>
+              <a:t>M3  </a:t>
+            </a:r>
+            <a:r>
+              <a:rPr sz="1500" b="0">
+                <a:solidFill>
+                  <a:srgbClr val="5A5A6E"/>
+                </a:solidFill>
+                <a:latin typeface="Helvetica Neue"/>
+              </a:rPr>
+              <a:t>W7-9      </a:t>
+            </a:r>
+            <a:r>
+              <a:rPr sz="1500" b="0">
                 <a:solidFill>
                   <a:srgbClr val="1A1A2E"/>
                 </a:solidFill>
                 <a:latin typeface="Helvetica Neue"/>
               </a:rPr>
-              <a:t>Definition of Done: spec signed off, merged, QA verified, no open bugs</a:t>
+              <a:t>Google Sign-In + donor register + FCM token registration end-to-end (feature 1)</a:t>
             </a:r>
           </a:p>
           <a:p>
             <a:pPr>
               <a:spcAft>
-                <a:spcPts val="1400"/>
+                <a:spcPts val="900"/>
               </a:spcAft>
             </a:pPr>
             <a:r>
-              <a:rPr sz="1900" b="1">
-                <a:solidFill>
-                  <a:srgbClr val="C0212E"/>
-                </a:solidFill>
-                <a:latin typeface="Helvetica Neue"/>
-              </a:rPr>
-              <a:t>▪  </a:t>
-            </a:r>
-            <a:r>
-              <a:rPr sz="1900" b="0">
+              <a:rPr sz="1700" b="1">
+                <a:solidFill>
+                  <a:srgbClr val="0F6B5F"/>
+                </a:solidFill>
+                <a:latin typeface="Helvetica Neue"/>
+              </a:rPr>
+              <a:t>M4  </a:t>
+            </a:r>
+            <a:r>
+              <a:rPr sz="1500" b="0">
+                <a:solidFill>
+                  <a:srgbClr val="5A5A6E"/>
+                </a:solidFill>
+                <a:latin typeface="Helvetica Neue"/>
+              </a:rPr>
+              <a:t>W10-12    </a:t>
+            </a:r>
+            <a:r>
+              <a:rPr sz="1500" b="0">
                 <a:solidFill>
                   <a:srgbClr val="1A1A2E"/>
                 </a:solidFill>
                 <a:latin typeface="Helvetica Neue"/>
               </a:rPr>
-              <a:t>Every architecture choice recorded as a decision record</a:t>
+              <a:t>Request create + ABO/Rh and distance matching + eligibility computation + request-alert push…</a:t>
             </a:r>
           </a:p>
           <a:p>
             <a:pPr>
               <a:spcAft>
-                <a:spcPts val="1400"/>
+                <a:spcPts val="900"/>
               </a:spcAft>
             </a:pPr>
             <a:r>
-              <a:rPr sz="1900" b="1">
+              <a:rPr sz="1700" b="1">
+                <a:solidFill>
+                  <a:srgbClr val="0F6B5F"/>
+                </a:solidFill>
+                <a:latin typeface="Helvetica Neue"/>
+              </a:rPr>
+              <a:t>M5  </a:t>
+            </a:r>
+            <a:r>
+              <a:rPr sz="1500" b="0">
+                <a:solidFill>
+                  <a:srgbClr val="5A5A6E"/>
+                </a:solidFill>
+                <a:latin typeface="Helvetica Neue"/>
+              </a:rPr>
+              <a:t>W13       </a:t>
+            </a:r>
+            <a:r>
+              <a:rPr sz="1500" b="0">
+                <a:solidFill>
+                  <a:srgbClr val="1A1A2E"/>
+                </a:solidFill>
+                <a:latin typeface="Helvetica Neue"/>
+              </a:rPr>
+              <a:t>Donation history list + 56-day eligibility status + the single hospital web page (feature 3)</a:t>
+            </a:r>
+          </a:p>
+          <a:p>
+            <a:pPr>
+              <a:spcAft>
+                <a:spcPts val="900"/>
+              </a:spcAft>
+            </a:pPr>
+            <a:r>
+              <a:rPr sz="1700" b="1">
+                <a:solidFill>
+                  <a:srgbClr val="0F6B5F"/>
+                </a:solidFill>
+                <a:latin typeface="Helvetica Neue"/>
+              </a:rPr>
+              <a:t>M6  </a:t>
+            </a:r>
+            <a:r>
+              <a:rPr sz="1500" b="0">
+                <a:solidFill>
+                  <a:srgbClr val="5A5A6E"/>
+                </a:solidFill>
+                <a:latin typeface="Helvetica Neue"/>
+              </a:rPr>
+              <a:t>W14       </a:t>
+            </a:r>
+            <a:r>
+              <a:rPr sz="1500" b="0">
+                <a:solidFill>
+                  <a:srgbClr val="1A1A2E"/>
+                </a:solidFill>
+                <a:latin typeface="Helvetica Neue"/>
+              </a:rPr>
+              <a:t>GPS via geolocator, Khmer/English i18n, Android build, iOS build (device/simulator only, DEC-…</a:t>
+            </a:r>
+          </a:p>
+          <a:p>
+            <a:pPr>
+              <a:spcAft>
+                <a:spcPts val="900"/>
+              </a:spcAft>
+            </a:pPr>
+            <a:r>
+              <a:rPr sz="1700" b="1">
                 <a:solidFill>
                   <a:srgbClr val="C0212E"/>
                 </a:solidFill>
                 <a:latin typeface="Helvetica Neue"/>
               </a:rPr>
-              <a:t>▪  </a:t>
-            </a:r>
-            <a:r>
-              <a:rPr sz="1900" b="0">
+              <a:t>M7  </a:t>
+            </a:r>
+            <a:r>
+              <a:rPr sz="1500" b="0">
+                <a:solidFill>
+                  <a:srgbClr val="5A5A6E"/>
+                </a:solidFill>
+                <a:latin typeface="Helvetica Neue"/>
+              </a:rPr>
+              <a:t>W15       </a:t>
+            </a:r>
+            <a:r>
+              <a:rPr sz="1500" b="1">
                 <a:solidFill>
                   <a:srgbClr val="1A1A2E"/>
                 </a:solidFill>
                 <a:latin typeface="Helvetica Neue"/>
               </a:rPr>
-              <a:t>Deferred features keep their documents — that is our future work</a:t>
+              <a:t>Test pass, signed AAB, Flutter app published to Play Store internal testing</a:t>
             </a:r>
           </a:p>
         </p:txBody>
@@ -8245,7 +8219,7 @@
                 </a:solidFill>
                 <a:latin typeface="Helvetica Neue"/>
               </a:rPr>
-              <a:t>LifeLink KH · Group 2 · Track B · Week 2 of 16</a:t>
+              <a:t>Parsed from CLAUDE.md section 4 — the single source for milestone dates</a:t>
             </a:r>
           </a:p>
         </p:txBody>
@@ -8258,7 +8232,7 @@
 </p:sld>
 </file>
 
-<file path=ppt/slides/slide8.xml><?xml version="1.0" encoding="utf-8"?>
+<file path=ppt/slides/slide9.xml><?xml version="1.0" encoding="utf-8"?>
 <p:sld xmlns:a="http://schemas.openxmlformats.org/drawingml/2006/main" xmlns:p="http://schemas.openxmlformats.org/presentationml/2006/main" xmlns:r="http://schemas.openxmlformats.org/officeDocument/2006/relationships">
   <p:cSld>
     <p:bg>
@@ -8305,7 +8279,7 @@
                 </a:solidFill>
                 <a:latin typeface="Helvetica Neue"/>
               </a:rPr>
-              <a:t>DEMO</a:t>
+              <a:t>WHEN</a:t>
             </a:r>
           </a:p>
           <a:p>
@@ -8316,7 +8290,7 @@
                 </a:solidFill>
                 <a:latin typeface="Noto Sans Khmer"/>
               </a:rPr>
-              <a:t>ការបង្ហាញផ្ទាល់</a:t>
+              <a:t>ស្ថានភាពបច្ចុប្បន្ន</a:t>
             </a:r>
           </a:p>
           <a:p>
@@ -8327,7 +8301,7 @@
                 </a:solidFill>
                 <a:latin typeface="Helvetica Neue"/>
               </a:rPr>
-              <a:t>Live Walkthrough</a:t>
+              <a:t>Where We Are Today</a:t>
             </a:r>
           </a:p>
         </p:txBody>
@@ -8419,7 +8393,7 @@
                 </a:solidFill>
                 <a:latin typeface="Helvetica Neue"/>
               </a:rPr>
-              <a:t>Two devices, one browser — donor, requester, hospital portal side by side</a:t>
+              <a:t>M1 complete — PRD, feature registry, schema design, API contract skeleton</a:t>
             </a:r>
           </a:p>
           <a:p>
@@ -8444,7 +8418,7 @@
                 </a:solidFill>
                 <a:latin typeface="Helvetica Neue"/>
               </a:rPr>
-              <a:t>Donor registers — Google Sign-in, blood type, district, no password</a:t>
+              <a:t>M2 specified in four layer specs, each with a pass/fail checklist</a:t>
             </a:r>
           </a:p>
           <a:p>
@@ -8469,7 +8443,7 @@
                 </a:solidFill>
                 <a:latin typeface="Helvetica Neue"/>
               </a:rPr>
-              <a:t>Requester creates an urgent request — blood type, urgency, hospital</a:t>
+              <a:t>Not yet built — the three code directories are still empty</a:t>
             </a:r>
           </a:p>
           <a:p>
@@ -8494,7 +8468,7 @@
                 </a:solidFill>
                 <a:latin typeface="Helvetica Neue"/>
               </a:rPr>
-              <a:t>Push notification fires — instant, targeted, not a Facebook scroll</a:t>
+              <a:t>Blocking M2: one API endpoint must reach the shared contract</a:t>
             </a:r>
           </a:p>
           <a:p>
@@ -8519,32 +8493,7 @@
                 </a:solidFill>
                 <a:latin typeface="Helvetica Neue"/>
               </a:rPr>
-              <a:t>Donor accepts; hospital confirms on the portal — cooldown starts</a:t>
-            </a:r>
-          </a:p>
-          <a:p>
-            <a:pPr>
-              <a:spcAft>
-                <a:spcPts val="1400"/>
-              </a:spcAft>
-            </a:pPr>
-            <a:r>
-              <a:rPr sz="1900" b="1">
-                <a:solidFill>
-                  <a:srgbClr val="C0212E"/>
-                </a:solidFill>
-                <a:latin typeface="Helvetica Neue"/>
-              </a:rPr>
-              <a:t>▪  </a:t>
-            </a:r>
-            <a:r>
-              <a:rPr sz="1900" b="0">
-                <a:solidFill>
-                  <a:srgbClr val="1A1A2E"/>
-                </a:solidFill>
-                <a:latin typeface="Helvetica Neue"/>
-              </a:rPr>
-              <a:t>Full script: docs/po/demo-script.md — narration for every step</a:t>
+              <a:t>Next: resolve three product decisions that gate M4 matching</a:t>
             </a:r>
           </a:p>
         </p:txBody>
@@ -8579,427 +8528,6 @@
                 <a:latin typeface="Helvetica Neue"/>
               </a:rPr>
               <a:t>LifeLink KH · Group 2 · Track B · Week 2 of 16</a:t>
-            </a:r>
-          </a:p>
-        </p:txBody>
-      </p:sp>
-    </p:spTree>
-  </p:cSld>
-  <p:clrMapOvr>
-    <a:masterClrMapping/>
-  </p:clrMapOvr>
-</p:sld>
-</file>
-
-<file path=ppt/slides/slide9.xml><?xml version="1.0" encoding="utf-8"?>
-<p:sld xmlns:a="http://schemas.openxmlformats.org/drawingml/2006/main" xmlns:p="http://schemas.openxmlformats.org/presentationml/2006/main" xmlns:r="http://schemas.openxmlformats.org/officeDocument/2006/relationships">
-  <p:cSld>
-    <p:bg>
-      <p:bgPr>
-        <a:solidFill>
-          <a:srgbClr val="FAFAF7"/>
-        </a:solidFill>
-        <a:effectLst/>
-      </p:bgPr>
-    </p:bg>
-    <p:spTree>
-      <p:nvGrpSpPr>
-        <p:cNvPr id="1" name=""/>
-        <p:cNvGrpSpPr/>
-        <p:nvPr/>
-      </p:nvGrpSpPr>
-      <p:grpSpPr/>
-      <p:sp>
-        <p:nvSpPr>
-          <p:cNvPr id="2" name="TextBox 1"/>
-          <p:cNvSpPr txBox="1"/>
-          <p:nvPr/>
-        </p:nvSpPr>
-        <p:spPr>
-          <a:xfrm>
-            <a:off x="731520" y="411480"/>
-            <a:ext cx="10698480" cy="1554480"/>
-          </a:xfrm>
-          <a:prstGeom prst="rect">
-            <a:avLst/>
-          </a:prstGeom>
-          <a:noFill/>
-        </p:spPr>
-        <p:txBody>
-          <a:bodyPr wrap="square">
-            <a:spAutoFit/>
-          </a:bodyPr>
-          <a:lstStyle/>
-          <a:p>
-            <a:r>
-              <a:rPr sz="1500" b="1">
-                <a:solidFill>
-                  <a:srgbClr val="0F6B5F"/>
-                </a:solidFill>
-                <a:latin typeface="Helvetica Neue"/>
-              </a:rPr>
-              <a:t>WHEN</a:t>
-            </a:r>
-          </a:p>
-          <a:p>
-            <a:r>
-              <a:rPr sz="3000" b="1">
-                <a:solidFill>
-                  <a:srgbClr val="1A1A2E"/>
-                </a:solidFill>
-                <a:latin typeface="Noto Sans Khmer"/>
-              </a:rPr>
-              <a:t>ដំណាក់កាលការងារ</a:t>
-            </a:r>
-          </a:p>
-          <a:p>
-            <a:r>
-              <a:rPr sz="3400" b="1">
-                <a:solidFill>
-                  <a:srgbClr val="C0212E"/>
-                </a:solidFill>
-                <a:latin typeface="Helvetica Neue"/>
-              </a:rPr>
-              <a:t>Milestones · M1 → M7</a:t>
-            </a:r>
-          </a:p>
-        </p:txBody>
-      </p:sp>
-      <p:sp>
-        <p:nvSpPr>
-          <p:cNvPr id="3" name="Rectangle 2"/>
-          <p:cNvSpPr/>
-          <p:nvPr/>
-        </p:nvSpPr>
-        <p:spPr>
-          <a:xfrm>
-            <a:off x="777240" y="2084831"/>
-            <a:ext cx="1280160" cy="34925"/>
-          </a:xfrm>
-          <a:prstGeom prst="rect">
-            <a:avLst/>
-          </a:prstGeom>
-          <a:solidFill>
-            <a:srgbClr val="C0212E"/>
-          </a:solidFill>
-          <a:ln>
-            <a:noFill/>
-          </a:ln>
-          <a:effectLst/>
-        </p:spPr>
-        <p:style>
-          <a:lnRef idx="1">
-            <a:schemeClr val="accent1"/>
-          </a:lnRef>
-          <a:fillRef idx="3">
-            <a:schemeClr val="accent1"/>
-          </a:fillRef>
-          <a:effectRef idx="2">
-            <a:schemeClr val="accent1"/>
-          </a:effectRef>
-          <a:fontRef idx="minor">
-            <a:schemeClr val="lt1"/>
-          </a:fontRef>
-        </p:style>
-        <p:txBody>
-          <a:bodyPr rtlCol="0" anchor="ctr"/>
-          <a:lstStyle/>
-          <a:p>
-            <a:pPr algn="ctr"/>
-          </a:p>
-        </p:txBody>
-      </p:sp>
-      <p:sp>
-        <p:nvSpPr>
-          <p:cNvPr id="4" name="TextBox 3"/>
-          <p:cNvSpPr txBox="1"/>
-          <p:nvPr/>
-        </p:nvSpPr>
-        <p:spPr>
-          <a:xfrm>
-            <a:off x="822960" y="2331720"/>
-            <a:ext cx="10607040" cy="3749039"/>
-          </a:xfrm>
-          <a:prstGeom prst="rect">
-            <a:avLst/>
-          </a:prstGeom>
-          <a:noFill/>
-        </p:spPr>
-        <p:txBody>
-          <a:bodyPr wrap="square">
-            <a:spAutoFit/>
-          </a:bodyPr>
-          <a:lstStyle/>
-          <a:p>
-            <a:pPr>
-              <a:spcAft>
-                <a:spcPts val="900"/>
-              </a:spcAft>
-            </a:pPr>
-            <a:r>
-              <a:rPr sz="1700" b="1">
-                <a:solidFill>
-                  <a:srgbClr val="0F6B5F"/>
-                </a:solidFill>
-                <a:latin typeface="Helvetica Neue"/>
-              </a:rPr>
-              <a:t>M1  </a:t>
-            </a:r>
-            <a:r>
-              <a:rPr sz="1500" b="0">
-                <a:solidFill>
-                  <a:srgbClr val="5A5A6E"/>
-                </a:solidFill>
-                <a:latin typeface="Helvetica Neue"/>
-              </a:rPr>
-              <a:t>W3-4      </a:t>
-            </a:r>
-            <a:r>
-              <a:rPr sz="1500" b="0">
-                <a:solidFill>
-                  <a:srgbClr val="1A1A2E"/>
-                </a:solidFill>
-                <a:latin typeface="Helvetica Neue"/>
-              </a:rPr>
-              <a:t>ERD (done), wireframes for the 4 core screens only, API spec for the 8 core FRs</a:t>
-            </a:r>
-          </a:p>
-          <a:p>
-            <a:pPr>
-              <a:spcAft>
-                <a:spcPts val="900"/>
-              </a:spcAft>
-            </a:pPr>
-            <a:r>
-              <a:rPr sz="1700" b="1">
-                <a:solidFill>
-                  <a:srgbClr val="0F6B5F"/>
-                </a:solidFill>
-                <a:latin typeface="Helvetica Neue"/>
-              </a:rPr>
-              <a:t>M2  </a:t>
-            </a:r>
-            <a:r>
-              <a:rPr sz="1500" b="0">
-                <a:solidFill>
-                  <a:srgbClr val="5A5A6E"/>
-                </a:solidFill>
-                <a:latin typeface="Helvetica Neue"/>
-              </a:rPr>
-              <a:t>W5-6      </a:t>
-            </a:r>
-            <a:r>
-              <a:rPr sz="1500" b="0">
-                <a:solidFill>
-                  <a:srgbClr val="1A1A2E"/>
-                </a:solidFill>
-                <a:latin typeface="Helvetica Neue"/>
-              </a:rPr>
-              <a:t>Spring Boot init (PostgreSQL, Flyway), Flutter + Next.js init, docker-compose up runs backend…</a:t>
-            </a:r>
-          </a:p>
-          <a:p>
-            <a:pPr>
-              <a:spcAft>
-                <a:spcPts val="900"/>
-              </a:spcAft>
-            </a:pPr>
-            <a:r>
-              <a:rPr sz="1700" b="1">
-                <a:solidFill>
-                  <a:srgbClr val="0F6B5F"/>
-                </a:solidFill>
-                <a:latin typeface="Helvetica Neue"/>
-              </a:rPr>
-              <a:t>M3  </a:t>
-            </a:r>
-            <a:r>
-              <a:rPr sz="1500" b="0">
-                <a:solidFill>
-                  <a:srgbClr val="5A5A6E"/>
-                </a:solidFill>
-                <a:latin typeface="Helvetica Neue"/>
-              </a:rPr>
-              <a:t>W7-9      </a:t>
-            </a:r>
-            <a:r>
-              <a:rPr sz="1500" b="0">
-                <a:solidFill>
-                  <a:srgbClr val="1A1A2E"/>
-                </a:solidFill>
-                <a:latin typeface="Helvetica Neue"/>
-              </a:rPr>
-              <a:t>Google Sign-In + donor register + FCM token registration end-to-end (feature 1)</a:t>
-            </a:r>
-          </a:p>
-          <a:p>
-            <a:pPr>
-              <a:spcAft>
-                <a:spcPts val="900"/>
-              </a:spcAft>
-            </a:pPr>
-            <a:r>
-              <a:rPr sz="1700" b="1">
-                <a:solidFill>
-                  <a:srgbClr val="0F6B5F"/>
-                </a:solidFill>
-                <a:latin typeface="Helvetica Neue"/>
-              </a:rPr>
-              <a:t>M4  </a:t>
-            </a:r>
-            <a:r>
-              <a:rPr sz="1500" b="0">
-                <a:solidFill>
-                  <a:srgbClr val="5A5A6E"/>
-                </a:solidFill>
-                <a:latin typeface="Helvetica Neue"/>
-              </a:rPr>
-              <a:t>W10-12    </a:t>
-            </a:r>
-            <a:r>
-              <a:rPr sz="1500" b="0">
-                <a:solidFill>
-                  <a:srgbClr val="1A1A2E"/>
-                </a:solidFill>
-                <a:latin typeface="Helvetica Neue"/>
-              </a:rPr>
-              <a:t>Request create + ABO/Rh and distance matching + eligibility computation + request-alert push…</a:t>
-            </a:r>
-          </a:p>
-          <a:p>
-            <a:pPr>
-              <a:spcAft>
-                <a:spcPts val="900"/>
-              </a:spcAft>
-            </a:pPr>
-            <a:r>
-              <a:rPr sz="1700" b="1">
-                <a:solidFill>
-                  <a:srgbClr val="0F6B5F"/>
-                </a:solidFill>
-                <a:latin typeface="Helvetica Neue"/>
-              </a:rPr>
-              <a:t>M5  </a:t>
-            </a:r>
-            <a:r>
-              <a:rPr sz="1500" b="0">
-                <a:solidFill>
-                  <a:srgbClr val="5A5A6E"/>
-                </a:solidFill>
-                <a:latin typeface="Helvetica Neue"/>
-              </a:rPr>
-              <a:t>W13       </a:t>
-            </a:r>
-            <a:r>
-              <a:rPr sz="1500" b="0">
-                <a:solidFill>
-                  <a:srgbClr val="1A1A2E"/>
-                </a:solidFill>
-                <a:latin typeface="Helvetica Neue"/>
-              </a:rPr>
-              <a:t>Donation history list + 56-day eligibility status + the single hospital web page (feature 3)</a:t>
-            </a:r>
-          </a:p>
-          <a:p>
-            <a:pPr>
-              <a:spcAft>
-                <a:spcPts val="900"/>
-              </a:spcAft>
-            </a:pPr>
-            <a:r>
-              <a:rPr sz="1700" b="1">
-                <a:solidFill>
-                  <a:srgbClr val="0F6B5F"/>
-                </a:solidFill>
-                <a:latin typeface="Helvetica Neue"/>
-              </a:rPr>
-              <a:t>M6  </a:t>
-            </a:r>
-            <a:r>
-              <a:rPr sz="1500" b="0">
-                <a:solidFill>
-                  <a:srgbClr val="5A5A6E"/>
-                </a:solidFill>
-                <a:latin typeface="Helvetica Neue"/>
-              </a:rPr>
-              <a:t>W14       </a:t>
-            </a:r>
-            <a:r>
-              <a:rPr sz="1500" b="0">
-                <a:solidFill>
-                  <a:srgbClr val="1A1A2E"/>
-                </a:solidFill>
-                <a:latin typeface="Helvetica Neue"/>
-              </a:rPr>
-              <a:t>GPS via geolocator, Khmer/English i18n, Android build, iOS build (device/simulator only, DEC-…</a:t>
-            </a:r>
-          </a:p>
-          <a:p>
-            <a:pPr>
-              <a:spcAft>
-                <a:spcPts val="900"/>
-              </a:spcAft>
-            </a:pPr>
-            <a:r>
-              <a:rPr sz="1700" b="1">
-                <a:solidFill>
-                  <a:srgbClr val="C0212E"/>
-                </a:solidFill>
-                <a:latin typeface="Helvetica Neue"/>
-              </a:rPr>
-              <a:t>M7  </a:t>
-            </a:r>
-            <a:r>
-              <a:rPr sz="1500" b="0">
-                <a:solidFill>
-                  <a:srgbClr val="5A5A6E"/>
-                </a:solidFill>
-                <a:latin typeface="Helvetica Neue"/>
-              </a:rPr>
-              <a:t>W15       </a:t>
-            </a:r>
-            <a:r>
-              <a:rPr sz="1500" b="1">
-                <a:solidFill>
-                  <a:srgbClr val="1A1A2E"/>
-                </a:solidFill>
-                <a:latin typeface="Helvetica Neue"/>
-              </a:rPr>
-              <a:t>Test pass, signed AAB, Flutter app published to Play Store internal testing</a:t>
-            </a:r>
-          </a:p>
-        </p:txBody>
-      </p:sp>
-      <p:sp>
-        <p:nvSpPr>
-          <p:cNvPr id="5" name="TextBox 4"/>
-          <p:cNvSpPr txBox="1"/>
-          <p:nvPr/>
-        </p:nvSpPr>
-        <p:spPr>
-          <a:xfrm>
-            <a:off x="777240" y="6263640"/>
-            <a:ext cx="10607040" cy="365760"/>
-          </a:xfrm>
-          <a:prstGeom prst="rect">
-            <a:avLst/>
-          </a:prstGeom>
-          <a:noFill/>
-        </p:spPr>
-        <p:txBody>
-          <a:bodyPr wrap="square">
-            <a:spAutoFit/>
-          </a:bodyPr>
-          <a:lstStyle/>
-          <a:p>
-            <a:r>
-              <a:rPr sz="1200" b="0">
-                <a:solidFill>
-                  <a:srgbClr val="5A5A6E"/>
-                </a:solidFill>
-                <a:latin typeface="Helvetica Neue"/>
-              </a:rPr>
-              <a:t>Parsed from CLAUDE.md section 4 — the single source for milestone dates</a:t>
             </a:r>
           </a:p>
         </p:txBody>
